--- a/public/fun/pack/pptx/talk/발표템플릿_38_업무보고_군고구마골목.pptx
+++ b/public/fun/pack/pptx/talk/발표템플릿_38_업무보고_군고구마골목.pptx
@@ -3286,14 +3286,6 @@
 <file path=ppt/slides/slide1.xml><?xml version="1.0" encoding="utf-8"?>
 <p:sld xmlns:a="http://schemas.openxmlformats.org/drawingml/2006/main" xmlns:p="http://schemas.openxmlformats.org/presentationml/2006/main" xmlns:r="http://schemas.openxmlformats.org/officeDocument/2006/relationships">
   <p:cSld>
-    <p:bg>
-      <p:bgPr>
-        <a:solidFill>
-          <a:srgbClr val="FBF3EF"/>
-        </a:solidFill>
-        <a:effectLst/>
-      </p:bgPr>
-    </p:bg>
     <p:spTree>
       <p:nvGrpSpPr>
         <p:cNvPr id="1" name=""/>
@@ -3301,383 +3293,30 @@
         <p:nvPr/>
       </p:nvGrpSpPr>
       <p:grpSpPr/>
-      <p:sp>
-        <p:nvSpPr>
-          <p:cNvPr id="3" name="장식"/>
-          <p:cNvSpPr/>
+      <p:pic>
+        <p:nvPicPr>
+          <p:cNvPr id="3" name="표지 그림" descr="talk-38.jpg"/>
+          <p:cNvPicPr>
+            <a:picLocks noChangeAspect="1"/>
+          </p:cNvPicPr>
           <p:nvPr/>
-        </p:nvSpPr>
-        <p:spPr>
-          <a:xfrm>
-            <a:off x="274320" y="274320"/>
-            <a:ext cx="11643055" cy="6309360"/>
+        </p:nvPicPr>
+        <p:blipFill>
+          <a:blip r:embed="rId2"/>
+          <a:stretch>
+            <a:fillRect/>
+          </a:stretch>
+        </p:blipFill>
+        <p:spPr>
+          <a:xfrm>
+            <a:off x="0" y="0"/>
+            <a:ext cx="12191695" cy="6858000"/>
           </a:xfrm>
           <a:prstGeom prst="rect">
             <a:avLst/>
           </a:prstGeom>
-          <a:noFill/>
-          <a:ln w="38100">
-            <a:solidFill>
-              <a:srgbClr val="995229"/>
-            </a:solidFill>
-          </a:ln>
-        </p:spPr>
-        <p:txBody>
-          <a:bodyPr rtlCol="0" anchor="ctr"/>
-          <a:lstStyle/>
-          <a:p>
-            <a:pPr algn="ctr"/>
-          </a:p>
-        </p:txBody>
-      </p:sp>
-      <p:sp>
-        <p:nvSpPr>
-          <p:cNvPr id="4" name="장식"/>
-          <p:cNvSpPr/>
-          <p:nvPr/>
-        </p:nvSpPr>
-        <p:spPr>
-          <a:xfrm>
-            <a:off x="457200" y="457200"/>
-            <a:ext cx="11277295" cy="5943600"/>
-          </a:xfrm>
-          <a:prstGeom prst="rect">
-            <a:avLst/>
-          </a:prstGeom>
-          <a:noFill/>
-          <a:ln w="12700">
-            <a:solidFill>
-              <a:srgbClr val="F4DBCD"/>
-            </a:solidFill>
-          </a:ln>
-        </p:spPr>
-        <p:txBody>
-          <a:bodyPr rtlCol="0" anchor="ctr"/>
-          <a:lstStyle/>
-          <a:p>
-            <a:pPr algn="ctr"/>
-          </a:p>
-        </p:txBody>
-      </p:sp>
-      <p:sp>
-        <p:nvSpPr>
-          <p:cNvPr id="5" name="장식"/>
-          <p:cNvSpPr/>
-          <p:nvPr/>
-        </p:nvSpPr>
-        <p:spPr>
-          <a:xfrm>
-            <a:off x="5854364" y="780551"/>
-            <a:ext cx="333470" cy="333470"/>
-          </a:xfrm>
-          <a:prstGeom prst="ellipse">
-            <a:avLst/>
-          </a:prstGeom>
-          <a:solidFill>
-            <a:srgbClr val="995229"/>
-          </a:solidFill>
-          <a:ln>
-            <a:noFill/>
-          </a:ln>
-        </p:spPr>
-        <p:txBody>
-          <a:bodyPr rtlCol="0" anchor="ctr"/>
-          <a:lstStyle/>
-          <a:p>
-            <a:pPr algn="ctr"/>
-          </a:p>
-        </p:txBody>
-      </p:sp>
-      <p:sp>
-        <p:nvSpPr>
-          <p:cNvPr id="6" name="장식"/>
-          <p:cNvSpPr/>
-          <p:nvPr/>
-        </p:nvSpPr>
-        <p:spPr>
-          <a:xfrm>
-            <a:off x="6892061" y="1623191"/>
-            <a:ext cx="200163" cy="200163"/>
-          </a:xfrm>
-          <a:prstGeom prst="ellipse">
-            <a:avLst/>
-          </a:prstGeom>
-          <a:solidFill>
-            <a:srgbClr val="F4DBCD"/>
-          </a:solidFill>
-          <a:ln>
-            <a:noFill/>
-          </a:ln>
-        </p:spPr>
-        <p:txBody>
-          <a:bodyPr rtlCol="0" anchor="ctr"/>
-          <a:lstStyle/>
-          <a:p>
-            <a:pPr algn="ctr"/>
-          </a:p>
-        </p:txBody>
-      </p:sp>
-      <p:sp>
-        <p:nvSpPr>
-          <p:cNvPr id="7" name="장식"/>
-          <p:cNvSpPr/>
-          <p:nvPr/>
-        </p:nvSpPr>
-        <p:spPr>
-          <a:xfrm>
-            <a:off x="5120089" y="1161505"/>
-            <a:ext cx="263527" cy="263527"/>
-          </a:xfrm>
-          <a:prstGeom prst="ellipse">
-            <a:avLst/>
-          </a:prstGeom>
-          <a:solidFill>
-            <a:srgbClr val="3B9185"/>
-          </a:solidFill>
-          <a:ln>
-            <a:noFill/>
-          </a:ln>
-        </p:spPr>
-        <p:txBody>
-          <a:bodyPr rtlCol="0" anchor="ctr"/>
-          <a:lstStyle/>
-          <a:p>
-            <a:pPr algn="ctr"/>
-          </a:p>
-        </p:txBody>
-      </p:sp>
-      <p:sp>
-        <p:nvSpPr>
-          <p:cNvPr id="8" name="장식"/>
-          <p:cNvSpPr/>
-          <p:nvPr/>
-        </p:nvSpPr>
-        <p:spPr>
-          <a:xfrm>
-            <a:off x="6364859" y="758859"/>
-            <a:ext cx="216496" cy="216496"/>
-          </a:xfrm>
-          <a:prstGeom prst="ellipse">
-            <a:avLst/>
-          </a:prstGeom>
-          <a:solidFill>
-            <a:srgbClr val="995229"/>
-          </a:solidFill>
-          <a:ln>
-            <a:noFill/>
-          </a:ln>
-        </p:spPr>
-        <p:txBody>
-          <a:bodyPr rtlCol="0" anchor="ctr"/>
-          <a:lstStyle/>
-          <a:p>
-            <a:pPr algn="ctr"/>
-          </a:p>
-        </p:txBody>
-      </p:sp>
-      <p:sp>
-        <p:nvSpPr>
-          <p:cNvPr id="9" name="장식"/>
-          <p:cNvSpPr/>
-          <p:nvPr/>
-        </p:nvSpPr>
-        <p:spPr>
-          <a:xfrm>
-            <a:off x="6068545" y="360190"/>
-            <a:ext cx="334832" cy="334832"/>
-          </a:xfrm>
-          <a:prstGeom prst="ellipse">
-            <a:avLst/>
-          </a:prstGeom>
-          <a:solidFill>
-            <a:srgbClr val="F4DBCD"/>
-          </a:solidFill>
-          <a:ln>
-            <a:noFill/>
-          </a:ln>
-        </p:spPr>
-        <p:txBody>
-          <a:bodyPr rtlCol="0" anchor="ctr"/>
-          <a:lstStyle/>
-          <a:p>
-            <a:pPr algn="ctr"/>
-          </a:p>
-        </p:txBody>
-      </p:sp>
-      <p:sp>
-        <p:nvSpPr>
-          <p:cNvPr id="10" name="장식"/>
-          <p:cNvSpPr/>
-          <p:nvPr/>
-        </p:nvSpPr>
-        <p:spPr>
-          <a:xfrm>
-            <a:off x="5437401" y="825259"/>
-            <a:ext cx="143688" cy="143688"/>
-          </a:xfrm>
-          <a:prstGeom prst="ellipse">
-            <a:avLst/>
-          </a:prstGeom>
-          <a:solidFill>
-            <a:srgbClr val="3B9185"/>
-          </a:solidFill>
-          <a:ln>
-            <a:noFill/>
-          </a:ln>
-        </p:spPr>
-        <p:txBody>
-          <a:bodyPr rtlCol="0" anchor="ctr"/>
-          <a:lstStyle/>
-          <a:p>
-            <a:pPr algn="ctr"/>
-          </a:p>
-        </p:txBody>
-      </p:sp>
-      <p:sp>
-        <p:nvSpPr>
-          <p:cNvPr id="11" name="장식"/>
-          <p:cNvSpPr/>
-          <p:nvPr/>
-        </p:nvSpPr>
-        <p:spPr>
-          <a:xfrm>
-            <a:off x="6550618" y="2104327"/>
-            <a:ext cx="285402" cy="285402"/>
-          </a:xfrm>
-          <a:prstGeom prst="ellipse">
-            <a:avLst/>
-          </a:prstGeom>
-          <a:solidFill>
-            <a:srgbClr val="995229"/>
-          </a:solidFill>
-          <a:ln>
-            <a:noFill/>
-          </a:ln>
-        </p:spPr>
-        <p:txBody>
-          <a:bodyPr rtlCol="0" anchor="ctr"/>
-          <a:lstStyle/>
-          <a:p>
-            <a:pPr algn="ctr"/>
-          </a:p>
-        </p:txBody>
-      </p:sp>
-      <p:sp>
-        <p:nvSpPr>
-          <p:cNvPr id="12" name="장식"/>
-          <p:cNvSpPr/>
-          <p:nvPr/>
-        </p:nvSpPr>
-        <p:spPr>
-          <a:xfrm>
-            <a:off x="6115670" y="917740"/>
-            <a:ext cx="267797" cy="267797"/>
-          </a:xfrm>
-          <a:prstGeom prst="ellipse">
-            <a:avLst/>
-          </a:prstGeom>
-          <a:solidFill>
-            <a:srgbClr val="F4DBCD"/>
-          </a:solidFill>
-          <a:ln>
-            <a:noFill/>
-          </a:ln>
-        </p:spPr>
-        <p:txBody>
-          <a:bodyPr rtlCol="0" anchor="ctr"/>
-          <a:lstStyle/>
-          <a:p>
-            <a:pPr algn="ctr"/>
-          </a:p>
-        </p:txBody>
-      </p:sp>
-      <p:sp>
-        <p:nvSpPr>
-          <p:cNvPr id="13" name="장식"/>
-          <p:cNvSpPr/>
-          <p:nvPr/>
-        </p:nvSpPr>
-        <p:spPr>
-          <a:xfrm>
-            <a:off x="6642241" y="1444838"/>
-            <a:ext cx="284342" cy="284342"/>
-          </a:xfrm>
-          <a:prstGeom prst="ellipse">
-            <a:avLst/>
-          </a:prstGeom>
-          <a:solidFill>
-            <a:srgbClr val="3B9185"/>
-          </a:solidFill>
-          <a:ln>
-            <a:noFill/>
-          </a:ln>
-        </p:spPr>
-        <p:txBody>
-          <a:bodyPr rtlCol="0" anchor="ctr"/>
-          <a:lstStyle/>
-          <a:p>
-            <a:pPr algn="ctr"/>
-          </a:p>
-        </p:txBody>
-      </p:sp>
-      <p:sp>
-        <p:nvSpPr>
-          <p:cNvPr id="14" name="장식"/>
-          <p:cNvSpPr/>
-          <p:nvPr/>
-        </p:nvSpPr>
-        <p:spPr>
-          <a:xfrm>
-            <a:off x="5561757" y="750724"/>
-            <a:ext cx="180660" cy="180660"/>
-          </a:xfrm>
-          <a:prstGeom prst="ellipse">
-            <a:avLst/>
-          </a:prstGeom>
-          <a:solidFill>
-            <a:srgbClr val="995229"/>
-          </a:solidFill>
-          <a:ln>
-            <a:noFill/>
-          </a:ln>
-        </p:spPr>
-        <p:txBody>
-          <a:bodyPr rtlCol="0" anchor="ctr"/>
-          <a:lstStyle/>
-          <a:p>
-            <a:pPr algn="ctr"/>
-          </a:p>
-        </p:txBody>
-      </p:sp>
-      <p:sp>
-        <p:nvSpPr>
-          <p:cNvPr id="15" name="장식"/>
-          <p:cNvSpPr/>
-          <p:nvPr/>
-        </p:nvSpPr>
-        <p:spPr>
-          <a:xfrm>
-            <a:off x="5279103" y="941758"/>
-            <a:ext cx="124614" cy="124614"/>
-          </a:xfrm>
-          <a:prstGeom prst="ellipse">
-            <a:avLst/>
-          </a:prstGeom>
-          <a:solidFill>
-            <a:srgbClr val="F4DBCD"/>
-          </a:solidFill>
-          <a:ln>
-            <a:noFill/>
-          </a:ln>
-        </p:spPr>
-        <p:txBody>
-          <a:bodyPr rtlCol="0" anchor="ctr"/>
-          <a:lstStyle/>
-          <a:p>
-            <a:pPr algn="ctr"/>
-          </a:p>
-        </p:txBody>
-      </p:sp>
+        </p:spPr>
+      </p:pic>
       <p:sp>
         <p:nvSpPr>
           <p:cNvPr id="2" name="Title 1"/>
@@ -3690,8 +3329,8 @@
         </p:nvSpPr>
         <p:spPr>
           <a:xfrm>
-            <a:off x="1463003" y="2331720"/>
-            <a:ext cx="9265688" cy="1371600"/>
+            <a:off x="853418" y="2057400"/>
+            <a:ext cx="6095847" cy="1554480"/>
           </a:xfrm>
         </p:spPr>
         <p:txBody>
@@ -3700,7 +3339,7 @@
           </a:bodyPr>
           <a:lstStyle/>
           <a:p>
-            <a:pPr algn="ctr">
+            <a:pPr algn="l">
               <a:lnSpc>
                 <a:spcPct val="105000"/>
               </a:lnSpc>
@@ -3718,14 +3357,14 @@
       </p:sp>
       <p:sp>
         <p:nvSpPr>
-          <p:cNvPr id="16" name="한 줄 문구"/>
+          <p:cNvPr id="4" name="한 줄 문구"/>
           <p:cNvSpPr txBox="1"/>
           <p:nvPr/>
         </p:nvSpPr>
         <p:spPr>
           <a:xfrm>
-            <a:off x="1463003" y="3794760"/>
-            <a:ext cx="9265688" cy="822960"/>
+            <a:off x="853418" y="3749039"/>
+            <a:ext cx="6095847" cy="822960"/>
           </a:xfrm>
           <a:prstGeom prst="rect">
             <a:avLst/>
@@ -3738,7 +3377,7 @@
           </a:bodyPr>
           <a:lstStyle/>
           <a:p>
-            <a:pPr algn="ctr">
+            <a:pPr algn="l">
               <a:lnSpc>
                 <a:spcPct val="115000"/>
               </a:lnSpc>
@@ -3749,21 +3388,21 @@
                   <a:srgbClr val="492713"/>
                 </a:solidFill>
               </a:rPr>
-              <a:t>따끈한 군고구마처럼 든든한 내용으로</a:t>
-            </a:r>
-          </a:p>
-        </p:txBody>
-      </p:sp>
-      <p:sp>
-        <p:nvSpPr>
-          <p:cNvPr id="17" name="안내 문구"/>
+              <a:t>목표 대비 실적을 비교했습니다</a:t>
+            </a:r>
+          </a:p>
+        </p:txBody>
+      </p:sp>
+      <p:sp>
+        <p:nvSpPr>
+          <p:cNvPr id="5" name="안내 문구"/>
           <p:cNvSpPr txBox="1"/>
           <p:nvPr/>
         </p:nvSpPr>
         <p:spPr>
           <a:xfrm>
-            <a:off x="1463003" y="4663440"/>
-            <a:ext cx="9265688" cy="914400"/>
+            <a:off x="853418" y="4617720"/>
+            <a:ext cx="6095847" cy="914400"/>
           </a:xfrm>
           <a:prstGeom prst="rect">
             <a:avLst/>
@@ -3776,7 +3415,7 @@
           </a:bodyPr>
           <a:lstStyle/>
           <a:p>
-            <a:pPr algn="ctr">
+            <a:pPr algn="l">
               <a:lnSpc>
                 <a:spcPct val="115000"/>
               </a:lnSpc>
@@ -3791,7 +3430,7 @@
             </a:r>
           </a:p>
           <a:p>
-            <a:pPr algn="ctr">
+            <a:pPr algn="l">
               <a:lnSpc>
                 <a:spcPct val="115000"/>
               </a:lnSpc>
@@ -3802,7 +3441,7 @@
                   <a:srgbClr val="666666"/>
                 </a:solidFill>
               </a:rPr>
-              <a:t>2026. 00. 00</a:t>
+              <a:t>2027. 00. 00</a:t>
             </a:r>
           </a:p>
         </p:txBody>
@@ -3893,325 +3532,6 @@
       </p:sp>
       <p:sp>
         <p:nvSpPr>
-          <p:cNvPr id="5" name="장식"/>
-          <p:cNvSpPr/>
-          <p:nvPr/>
-        </p:nvSpPr>
-        <p:spPr>
-          <a:xfrm>
-            <a:off x="10914538" y="631759"/>
-            <a:ext cx="185261" cy="185261"/>
-          </a:xfrm>
-          <a:prstGeom prst="ellipse">
-            <a:avLst/>
-          </a:prstGeom>
-          <a:solidFill>
-            <a:srgbClr val="995229"/>
-          </a:solidFill>
-          <a:ln>
-            <a:noFill/>
-          </a:ln>
-        </p:spPr>
-        <p:txBody>
-          <a:bodyPr rtlCol="0" anchor="ctr"/>
-          <a:lstStyle/>
-          <a:p>
-            <a:pPr algn="ctr"/>
-          </a:p>
-        </p:txBody>
-      </p:sp>
-      <p:sp>
-        <p:nvSpPr>
-          <p:cNvPr id="6" name="장식"/>
-          <p:cNvSpPr/>
-          <p:nvPr/>
-        </p:nvSpPr>
-        <p:spPr>
-          <a:xfrm>
-            <a:off x="11491036" y="1099893"/>
-            <a:ext cx="111201" cy="111201"/>
-          </a:xfrm>
-          <a:prstGeom prst="ellipse">
-            <a:avLst/>
-          </a:prstGeom>
-          <a:solidFill>
-            <a:srgbClr val="F4DBCD"/>
-          </a:solidFill>
-          <a:ln>
-            <a:noFill/>
-          </a:ln>
-        </p:spPr>
-        <p:txBody>
-          <a:bodyPr rtlCol="0" anchor="ctr"/>
-          <a:lstStyle/>
-          <a:p>
-            <a:pPr algn="ctr"/>
-          </a:p>
-        </p:txBody>
-      </p:sp>
-      <p:sp>
-        <p:nvSpPr>
-          <p:cNvPr id="7" name="장식"/>
-          <p:cNvSpPr/>
-          <p:nvPr/>
-        </p:nvSpPr>
-        <p:spPr>
-          <a:xfrm>
-            <a:off x="10506607" y="843400"/>
-            <a:ext cx="146404" cy="146404"/>
-          </a:xfrm>
-          <a:prstGeom prst="ellipse">
-            <a:avLst/>
-          </a:prstGeom>
-          <a:solidFill>
-            <a:srgbClr val="3B9185"/>
-          </a:solidFill>
-          <a:ln>
-            <a:noFill/>
-          </a:ln>
-        </p:spPr>
-        <p:txBody>
-          <a:bodyPr rtlCol="0" anchor="ctr"/>
-          <a:lstStyle/>
-          <a:p>
-            <a:pPr algn="ctr"/>
-          </a:p>
-        </p:txBody>
-      </p:sp>
-      <p:sp>
-        <p:nvSpPr>
-          <p:cNvPr id="8" name="장식"/>
-          <p:cNvSpPr/>
-          <p:nvPr/>
-        </p:nvSpPr>
-        <p:spPr>
-          <a:xfrm>
-            <a:off x="11198146" y="619708"/>
-            <a:ext cx="120275" cy="120275"/>
-          </a:xfrm>
-          <a:prstGeom prst="ellipse">
-            <a:avLst/>
-          </a:prstGeom>
-          <a:solidFill>
-            <a:srgbClr val="995229"/>
-          </a:solidFill>
-          <a:ln>
-            <a:noFill/>
-          </a:ln>
-        </p:spPr>
-        <p:txBody>
-          <a:bodyPr rtlCol="0" anchor="ctr"/>
-          <a:lstStyle/>
-          <a:p>
-            <a:pPr algn="ctr"/>
-          </a:p>
-        </p:txBody>
-      </p:sp>
-      <p:sp>
-        <p:nvSpPr>
-          <p:cNvPr id="9" name="장식"/>
-          <p:cNvSpPr/>
-          <p:nvPr/>
-        </p:nvSpPr>
-        <p:spPr>
-          <a:xfrm>
-            <a:off x="11033527" y="398225"/>
-            <a:ext cx="186017" cy="186017"/>
-          </a:xfrm>
-          <a:prstGeom prst="ellipse">
-            <a:avLst/>
-          </a:prstGeom>
-          <a:solidFill>
-            <a:srgbClr val="F4DBCD"/>
-          </a:solidFill>
-          <a:ln>
-            <a:noFill/>
-          </a:ln>
-        </p:spPr>
-        <p:txBody>
-          <a:bodyPr rtlCol="0" anchor="ctr"/>
-          <a:lstStyle/>
-          <a:p>
-            <a:pPr algn="ctr"/>
-          </a:p>
-        </p:txBody>
-      </p:sp>
-      <p:sp>
-        <p:nvSpPr>
-          <p:cNvPr id="10" name="장식"/>
-          <p:cNvSpPr/>
-          <p:nvPr/>
-        </p:nvSpPr>
-        <p:spPr>
-          <a:xfrm>
-            <a:off x="10682891" y="656597"/>
-            <a:ext cx="79826" cy="79826"/>
-          </a:xfrm>
-          <a:prstGeom prst="ellipse">
-            <a:avLst/>
-          </a:prstGeom>
-          <a:solidFill>
-            <a:srgbClr val="3B9185"/>
-          </a:solidFill>
-          <a:ln>
-            <a:noFill/>
-          </a:ln>
-        </p:spPr>
-        <p:txBody>
-          <a:bodyPr rtlCol="0" anchor="ctr"/>
-          <a:lstStyle/>
-          <a:p>
-            <a:pPr algn="ctr"/>
-          </a:p>
-        </p:txBody>
-      </p:sp>
-      <p:sp>
-        <p:nvSpPr>
-          <p:cNvPr id="11" name="장식"/>
-          <p:cNvSpPr/>
-          <p:nvPr/>
-        </p:nvSpPr>
-        <p:spPr>
-          <a:xfrm>
-            <a:off x="11301345" y="1367190"/>
-            <a:ext cx="158557" cy="158557"/>
-          </a:xfrm>
-          <a:prstGeom prst="ellipse">
-            <a:avLst/>
-          </a:prstGeom>
-          <a:solidFill>
-            <a:srgbClr val="995229"/>
-          </a:solidFill>
-          <a:ln>
-            <a:noFill/>
-          </a:ln>
-        </p:spPr>
-        <p:txBody>
-          <a:bodyPr rtlCol="0" anchor="ctr"/>
-          <a:lstStyle/>
-          <a:p>
-            <a:pPr algn="ctr"/>
-          </a:p>
-        </p:txBody>
-      </p:sp>
-      <p:sp>
-        <p:nvSpPr>
-          <p:cNvPr id="12" name="장식"/>
-          <p:cNvSpPr/>
-          <p:nvPr/>
-        </p:nvSpPr>
-        <p:spPr>
-          <a:xfrm>
-            <a:off x="11059707" y="707976"/>
-            <a:ext cx="148776" cy="148776"/>
-          </a:xfrm>
-          <a:prstGeom prst="ellipse">
-            <a:avLst/>
-          </a:prstGeom>
-          <a:solidFill>
-            <a:srgbClr val="F4DBCD"/>
-          </a:solidFill>
-          <a:ln>
-            <a:noFill/>
-          </a:ln>
-        </p:spPr>
-        <p:txBody>
-          <a:bodyPr rtlCol="0" anchor="ctr"/>
-          <a:lstStyle/>
-          <a:p>
-            <a:pPr algn="ctr"/>
-          </a:p>
-        </p:txBody>
-      </p:sp>
-      <p:sp>
-        <p:nvSpPr>
-          <p:cNvPr id="13" name="장식"/>
-          <p:cNvSpPr/>
-          <p:nvPr/>
-        </p:nvSpPr>
-        <p:spPr>
-          <a:xfrm>
-            <a:off x="11352247" y="1000807"/>
-            <a:ext cx="157967" cy="157967"/>
-          </a:xfrm>
-          <a:prstGeom prst="ellipse">
-            <a:avLst/>
-          </a:prstGeom>
-          <a:solidFill>
-            <a:srgbClr val="3B9185"/>
-          </a:solidFill>
-          <a:ln>
-            <a:noFill/>
-          </a:ln>
-        </p:spPr>
-        <p:txBody>
-          <a:bodyPr rtlCol="0" anchor="ctr"/>
-          <a:lstStyle/>
-          <a:p>
-            <a:pPr algn="ctr"/>
-          </a:p>
-        </p:txBody>
-      </p:sp>
-      <p:sp>
-        <p:nvSpPr>
-          <p:cNvPr id="14" name="장식"/>
-          <p:cNvSpPr/>
-          <p:nvPr/>
-        </p:nvSpPr>
-        <p:spPr>
-          <a:xfrm>
-            <a:off x="10751978" y="615189"/>
-            <a:ext cx="100367" cy="100367"/>
-          </a:xfrm>
-          <a:prstGeom prst="ellipse">
-            <a:avLst/>
-          </a:prstGeom>
-          <a:solidFill>
-            <a:srgbClr val="995229"/>
-          </a:solidFill>
-          <a:ln>
-            <a:noFill/>
-          </a:ln>
-        </p:spPr>
-        <p:txBody>
-          <a:bodyPr rtlCol="0" anchor="ctr"/>
-          <a:lstStyle/>
-          <a:p>
-            <a:pPr algn="ctr"/>
-          </a:p>
-        </p:txBody>
-      </p:sp>
-      <p:sp>
-        <p:nvSpPr>
-          <p:cNvPr id="15" name="장식"/>
-          <p:cNvSpPr/>
-          <p:nvPr/>
-        </p:nvSpPr>
-        <p:spPr>
-          <a:xfrm>
-            <a:off x="10594948" y="721318"/>
-            <a:ext cx="69230" cy="69230"/>
-          </a:xfrm>
-          <a:prstGeom prst="ellipse">
-            <a:avLst/>
-          </a:prstGeom>
-          <a:solidFill>
-            <a:srgbClr val="F4DBCD"/>
-          </a:solidFill>
-          <a:ln>
-            <a:noFill/>
-          </a:ln>
-        </p:spPr>
-        <p:txBody>
-          <a:bodyPr rtlCol="0" anchor="ctr"/>
-          <a:lstStyle/>
-          <a:p>
-            <a:pPr algn="ctr"/>
-          </a:p>
-        </p:txBody>
-      </p:sp>
-      <p:sp>
-        <p:nvSpPr>
           <p:cNvPr id="2" name="Title 1"/>
           <p:cNvSpPr>
             <a:spLocks noGrp="1"/>
@@ -4250,7 +3570,7 @@
       </p:sp>
       <p:sp>
         <p:nvSpPr>
-          <p:cNvPr id="16" name="줄 1"/>
+          <p:cNvPr id="5" name="줄 1"/>
           <p:cNvSpPr/>
           <p:nvPr/>
         </p:nvSpPr>
@@ -4283,7 +3603,7 @@
       </p:sp>
       <p:sp>
         <p:nvSpPr>
-          <p:cNvPr id="17" name="번호 1"/>
+          <p:cNvPr id="6" name="번호 1"/>
           <p:cNvSpPr/>
           <p:nvPr/>
         </p:nvSpPr>
@@ -4326,7 +3646,7 @@
       </p:sp>
       <p:sp>
         <p:nvSpPr>
-          <p:cNvPr id="18" name="TextBox 17"/>
+          <p:cNvPr id="7" name="TextBox 6"/>
           <p:cNvSpPr txBox="1"/>
           <p:nvPr/>
         </p:nvSpPr>
@@ -4364,7 +3684,7 @@
       </p:sp>
       <p:sp>
         <p:nvSpPr>
-          <p:cNvPr id="19" name="TextBox 18"/>
+          <p:cNvPr id="8" name="TextBox 7"/>
           <p:cNvSpPr txBox="1"/>
           <p:nvPr/>
         </p:nvSpPr>
@@ -4402,7 +3722,7 @@
       </p:sp>
       <p:sp>
         <p:nvSpPr>
-          <p:cNvPr id="20" name="줄 2"/>
+          <p:cNvPr id="9" name="줄 2"/>
           <p:cNvSpPr/>
           <p:nvPr/>
         </p:nvSpPr>
@@ -4435,7 +3755,7 @@
       </p:sp>
       <p:sp>
         <p:nvSpPr>
-          <p:cNvPr id="21" name="번호 2"/>
+          <p:cNvPr id="10" name="번호 2"/>
           <p:cNvSpPr/>
           <p:nvPr/>
         </p:nvSpPr>
@@ -4478,7 +3798,7 @@
       </p:sp>
       <p:sp>
         <p:nvSpPr>
-          <p:cNvPr id="22" name="TextBox 21"/>
+          <p:cNvPr id="11" name="TextBox 10"/>
           <p:cNvSpPr txBox="1"/>
           <p:nvPr/>
         </p:nvSpPr>
@@ -4516,7 +3836,7 @@
       </p:sp>
       <p:sp>
         <p:nvSpPr>
-          <p:cNvPr id="23" name="TextBox 22"/>
+          <p:cNvPr id="12" name="TextBox 11"/>
           <p:cNvSpPr txBox="1"/>
           <p:nvPr/>
         </p:nvSpPr>
@@ -4554,7 +3874,7 @@
       </p:sp>
       <p:sp>
         <p:nvSpPr>
-          <p:cNvPr id="24" name="줄 3"/>
+          <p:cNvPr id="13" name="줄 3"/>
           <p:cNvSpPr/>
           <p:nvPr/>
         </p:nvSpPr>
@@ -4587,7 +3907,7 @@
       </p:sp>
       <p:sp>
         <p:nvSpPr>
-          <p:cNvPr id="25" name="번호 3"/>
+          <p:cNvPr id="14" name="번호 3"/>
           <p:cNvSpPr/>
           <p:nvPr/>
         </p:nvSpPr>
@@ -4630,7 +3950,7 @@
       </p:sp>
       <p:sp>
         <p:nvSpPr>
-          <p:cNvPr id="26" name="TextBox 25"/>
+          <p:cNvPr id="15" name="TextBox 14"/>
           <p:cNvSpPr txBox="1"/>
           <p:nvPr/>
         </p:nvSpPr>
@@ -4668,7 +3988,7 @@
       </p:sp>
       <p:sp>
         <p:nvSpPr>
-          <p:cNvPr id="27" name="TextBox 26"/>
+          <p:cNvPr id="16" name="TextBox 15"/>
           <p:cNvSpPr txBox="1"/>
           <p:nvPr/>
         </p:nvSpPr>
@@ -4706,7 +4026,7 @@
       </p:sp>
       <p:sp>
         <p:nvSpPr>
-          <p:cNvPr id="28" name="줄 4"/>
+          <p:cNvPr id="17" name="줄 4"/>
           <p:cNvSpPr/>
           <p:nvPr/>
         </p:nvSpPr>
@@ -4739,7 +4059,7 @@
       </p:sp>
       <p:sp>
         <p:nvSpPr>
-          <p:cNvPr id="29" name="번호 4"/>
+          <p:cNvPr id="18" name="번호 4"/>
           <p:cNvSpPr/>
           <p:nvPr/>
         </p:nvSpPr>
@@ -4782,7 +4102,7 @@
       </p:sp>
       <p:sp>
         <p:nvSpPr>
-          <p:cNvPr id="30" name="TextBox 29"/>
+          <p:cNvPr id="19" name="TextBox 18"/>
           <p:cNvSpPr txBox="1"/>
           <p:nvPr/>
         </p:nvSpPr>
@@ -4820,7 +4140,7 @@
       </p:sp>
       <p:sp>
         <p:nvSpPr>
-          <p:cNvPr id="31" name="TextBox 30"/>
+          <p:cNvPr id="20" name="TextBox 19"/>
           <p:cNvSpPr txBox="1"/>
           <p:nvPr/>
         </p:nvSpPr>
@@ -4942,325 +4262,6 @@
       </p:sp>
       <p:sp>
         <p:nvSpPr>
-          <p:cNvPr id="5" name="장식"/>
-          <p:cNvSpPr/>
-          <p:nvPr/>
-        </p:nvSpPr>
-        <p:spPr>
-          <a:xfrm>
-            <a:off x="10914538" y="631759"/>
-            <a:ext cx="185261" cy="185261"/>
-          </a:xfrm>
-          <a:prstGeom prst="ellipse">
-            <a:avLst/>
-          </a:prstGeom>
-          <a:solidFill>
-            <a:srgbClr val="995229"/>
-          </a:solidFill>
-          <a:ln>
-            <a:noFill/>
-          </a:ln>
-        </p:spPr>
-        <p:txBody>
-          <a:bodyPr rtlCol="0" anchor="ctr"/>
-          <a:lstStyle/>
-          <a:p>
-            <a:pPr algn="ctr"/>
-          </a:p>
-        </p:txBody>
-      </p:sp>
-      <p:sp>
-        <p:nvSpPr>
-          <p:cNvPr id="6" name="장식"/>
-          <p:cNvSpPr/>
-          <p:nvPr/>
-        </p:nvSpPr>
-        <p:spPr>
-          <a:xfrm>
-            <a:off x="11491036" y="1099893"/>
-            <a:ext cx="111201" cy="111201"/>
-          </a:xfrm>
-          <a:prstGeom prst="ellipse">
-            <a:avLst/>
-          </a:prstGeom>
-          <a:solidFill>
-            <a:srgbClr val="F4DBCD"/>
-          </a:solidFill>
-          <a:ln>
-            <a:noFill/>
-          </a:ln>
-        </p:spPr>
-        <p:txBody>
-          <a:bodyPr rtlCol="0" anchor="ctr"/>
-          <a:lstStyle/>
-          <a:p>
-            <a:pPr algn="ctr"/>
-          </a:p>
-        </p:txBody>
-      </p:sp>
-      <p:sp>
-        <p:nvSpPr>
-          <p:cNvPr id="7" name="장식"/>
-          <p:cNvSpPr/>
-          <p:nvPr/>
-        </p:nvSpPr>
-        <p:spPr>
-          <a:xfrm>
-            <a:off x="10506607" y="843400"/>
-            <a:ext cx="146404" cy="146404"/>
-          </a:xfrm>
-          <a:prstGeom prst="ellipse">
-            <a:avLst/>
-          </a:prstGeom>
-          <a:solidFill>
-            <a:srgbClr val="3B9185"/>
-          </a:solidFill>
-          <a:ln>
-            <a:noFill/>
-          </a:ln>
-        </p:spPr>
-        <p:txBody>
-          <a:bodyPr rtlCol="0" anchor="ctr"/>
-          <a:lstStyle/>
-          <a:p>
-            <a:pPr algn="ctr"/>
-          </a:p>
-        </p:txBody>
-      </p:sp>
-      <p:sp>
-        <p:nvSpPr>
-          <p:cNvPr id="8" name="장식"/>
-          <p:cNvSpPr/>
-          <p:nvPr/>
-        </p:nvSpPr>
-        <p:spPr>
-          <a:xfrm>
-            <a:off x="11198146" y="619708"/>
-            <a:ext cx="120275" cy="120275"/>
-          </a:xfrm>
-          <a:prstGeom prst="ellipse">
-            <a:avLst/>
-          </a:prstGeom>
-          <a:solidFill>
-            <a:srgbClr val="995229"/>
-          </a:solidFill>
-          <a:ln>
-            <a:noFill/>
-          </a:ln>
-        </p:spPr>
-        <p:txBody>
-          <a:bodyPr rtlCol="0" anchor="ctr"/>
-          <a:lstStyle/>
-          <a:p>
-            <a:pPr algn="ctr"/>
-          </a:p>
-        </p:txBody>
-      </p:sp>
-      <p:sp>
-        <p:nvSpPr>
-          <p:cNvPr id="9" name="장식"/>
-          <p:cNvSpPr/>
-          <p:nvPr/>
-        </p:nvSpPr>
-        <p:spPr>
-          <a:xfrm>
-            <a:off x="11033527" y="398225"/>
-            <a:ext cx="186017" cy="186017"/>
-          </a:xfrm>
-          <a:prstGeom prst="ellipse">
-            <a:avLst/>
-          </a:prstGeom>
-          <a:solidFill>
-            <a:srgbClr val="F4DBCD"/>
-          </a:solidFill>
-          <a:ln>
-            <a:noFill/>
-          </a:ln>
-        </p:spPr>
-        <p:txBody>
-          <a:bodyPr rtlCol="0" anchor="ctr"/>
-          <a:lstStyle/>
-          <a:p>
-            <a:pPr algn="ctr"/>
-          </a:p>
-        </p:txBody>
-      </p:sp>
-      <p:sp>
-        <p:nvSpPr>
-          <p:cNvPr id="10" name="장식"/>
-          <p:cNvSpPr/>
-          <p:nvPr/>
-        </p:nvSpPr>
-        <p:spPr>
-          <a:xfrm>
-            <a:off x="10682891" y="656597"/>
-            <a:ext cx="79826" cy="79826"/>
-          </a:xfrm>
-          <a:prstGeom prst="ellipse">
-            <a:avLst/>
-          </a:prstGeom>
-          <a:solidFill>
-            <a:srgbClr val="3B9185"/>
-          </a:solidFill>
-          <a:ln>
-            <a:noFill/>
-          </a:ln>
-        </p:spPr>
-        <p:txBody>
-          <a:bodyPr rtlCol="0" anchor="ctr"/>
-          <a:lstStyle/>
-          <a:p>
-            <a:pPr algn="ctr"/>
-          </a:p>
-        </p:txBody>
-      </p:sp>
-      <p:sp>
-        <p:nvSpPr>
-          <p:cNvPr id="11" name="장식"/>
-          <p:cNvSpPr/>
-          <p:nvPr/>
-        </p:nvSpPr>
-        <p:spPr>
-          <a:xfrm>
-            <a:off x="11301345" y="1367190"/>
-            <a:ext cx="158557" cy="158557"/>
-          </a:xfrm>
-          <a:prstGeom prst="ellipse">
-            <a:avLst/>
-          </a:prstGeom>
-          <a:solidFill>
-            <a:srgbClr val="995229"/>
-          </a:solidFill>
-          <a:ln>
-            <a:noFill/>
-          </a:ln>
-        </p:spPr>
-        <p:txBody>
-          <a:bodyPr rtlCol="0" anchor="ctr"/>
-          <a:lstStyle/>
-          <a:p>
-            <a:pPr algn="ctr"/>
-          </a:p>
-        </p:txBody>
-      </p:sp>
-      <p:sp>
-        <p:nvSpPr>
-          <p:cNvPr id="12" name="장식"/>
-          <p:cNvSpPr/>
-          <p:nvPr/>
-        </p:nvSpPr>
-        <p:spPr>
-          <a:xfrm>
-            <a:off x="11059707" y="707976"/>
-            <a:ext cx="148776" cy="148776"/>
-          </a:xfrm>
-          <a:prstGeom prst="ellipse">
-            <a:avLst/>
-          </a:prstGeom>
-          <a:solidFill>
-            <a:srgbClr val="F4DBCD"/>
-          </a:solidFill>
-          <a:ln>
-            <a:noFill/>
-          </a:ln>
-        </p:spPr>
-        <p:txBody>
-          <a:bodyPr rtlCol="0" anchor="ctr"/>
-          <a:lstStyle/>
-          <a:p>
-            <a:pPr algn="ctr"/>
-          </a:p>
-        </p:txBody>
-      </p:sp>
-      <p:sp>
-        <p:nvSpPr>
-          <p:cNvPr id="13" name="장식"/>
-          <p:cNvSpPr/>
-          <p:nvPr/>
-        </p:nvSpPr>
-        <p:spPr>
-          <a:xfrm>
-            <a:off x="11352247" y="1000807"/>
-            <a:ext cx="157967" cy="157967"/>
-          </a:xfrm>
-          <a:prstGeom prst="ellipse">
-            <a:avLst/>
-          </a:prstGeom>
-          <a:solidFill>
-            <a:srgbClr val="3B9185"/>
-          </a:solidFill>
-          <a:ln>
-            <a:noFill/>
-          </a:ln>
-        </p:spPr>
-        <p:txBody>
-          <a:bodyPr rtlCol="0" anchor="ctr"/>
-          <a:lstStyle/>
-          <a:p>
-            <a:pPr algn="ctr"/>
-          </a:p>
-        </p:txBody>
-      </p:sp>
-      <p:sp>
-        <p:nvSpPr>
-          <p:cNvPr id="14" name="장식"/>
-          <p:cNvSpPr/>
-          <p:nvPr/>
-        </p:nvSpPr>
-        <p:spPr>
-          <a:xfrm>
-            <a:off x="10751978" y="615189"/>
-            <a:ext cx="100367" cy="100367"/>
-          </a:xfrm>
-          <a:prstGeom prst="ellipse">
-            <a:avLst/>
-          </a:prstGeom>
-          <a:solidFill>
-            <a:srgbClr val="995229"/>
-          </a:solidFill>
-          <a:ln>
-            <a:noFill/>
-          </a:ln>
-        </p:spPr>
-        <p:txBody>
-          <a:bodyPr rtlCol="0" anchor="ctr"/>
-          <a:lstStyle/>
-          <a:p>
-            <a:pPr algn="ctr"/>
-          </a:p>
-        </p:txBody>
-      </p:sp>
-      <p:sp>
-        <p:nvSpPr>
-          <p:cNvPr id="15" name="장식"/>
-          <p:cNvSpPr/>
-          <p:nvPr/>
-        </p:nvSpPr>
-        <p:spPr>
-          <a:xfrm>
-            <a:off x="10594948" y="721318"/>
-            <a:ext cx="69230" cy="69230"/>
-          </a:xfrm>
-          <a:prstGeom prst="ellipse">
-            <a:avLst/>
-          </a:prstGeom>
-          <a:solidFill>
-            <a:srgbClr val="F4DBCD"/>
-          </a:solidFill>
-          <a:ln>
-            <a:noFill/>
-          </a:ln>
-        </p:spPr>
-        <p:txBody>
-          <a:bodyPr rtlCol="0" anchor="ctr"/>
-          <a:lstStyle/>
-          <a:p>
-            <a:pPr algn="ctr"/>
-          </a:p>
-        </p:txBody>
-      </p:sp>
-      <p:sp>
-        <p:nvSpPr>
           <p:cNvPr id="2" name="Title 1"/>
           <p:cNvSpPr>
             <a:spLocks noGrp="1"/>
@@ -5299,7 +4300,7 @@
       </p:sp>
       <p:sp>
         <p:nvSpPr>
-          <p:cNvPr id="16" name="핵심 문장"/>
+          <p:cNvPr id="5" name="핵심 문장"/>
           <p:cNvSpPr txBox="1"/>
           <p:nvPr/>
         </p:nvSpPr>
@@ -5337,7 +4338,7 @@
       </p:sp>
       <p:sp>
         <p:nvSpPr>
-          <p:cNvPr id="17" name="카드 1"/>
+          <p:cNvPr id="6" name="카드 1"/>
           <p:cNvSpPr/>
           <p:nvPr/>
         </p:nvSpPr>
@@ -5370,7 +4371,7 @@
       </p:sp>
       <p:sp>
         <p:nvSpPr>
-          <p:cNvPr id="18" name="번호 1"/>
+          <p:cNvPr id="7" name="번호 1"/>
           <p:cNvSpPr/>
           <p:nvPr/>
         </p:nvSpPr>
@@ -5413,7 +4414,7 @@
       </p:sp>
       <p:sp>
         <p:nvSpPr>
-          <p:cNvPr id="19" name="TextBox 18"/>
+          <p:cNvPr id="8" name="TextBox 7"/>
           <p:cNvSpPr txBox="1"/>
           <p:nvPr/>
         </p:nvSpPr>
@@ -5451,7 +4452,7 @@
       </p:sp>
       <p:sp>
         <p:nvSpPr>
-          <p:cNvPr id="20" name="TextBox 19"/>
+          <p:cNvPr id="9" name="TextBox 8"/>
           <p:cNvSpPr txBox="1"/>
           <p:nvPr/>
         </p:nvSpPr>
@@ -5504,7 +4505,7 @@
       </p:sp>
       <p:sp>
         <p:nvSpPr>
-          <p:cNvPr id="21" name="카드 2"/>
+          <p:cNvPr id="10" name="카드 2"/>
           <p:cNvSpPr/>
           <p:nvPr/>
         </p:nvSpPr>
@@ -5537,7 +4538,7 @@
       </p:sp>
       <p:sp>
         <p:nvSpPr>
-          <p:cNvPr id="22" name="번호 2"/>
+          <p:cNvPr id="11" name="번호 2"/>
           <p:cNvSpPr/>
           <p:nvPr/>
         </p:nvSpPr>
@@ -5580,7 +4581,7 @@
       </p:sp>
       <p:sp>
         <p:nvSpPr>
-          <p:cNvPr id="23" name="TextBox 22"/>
+          <p:cNvPr id="12" name="TextBox 11"/>
           <p:cNvSpPr txBox="1"/>
           <p:nvPr/>
         </p:nvSpPr>
@@ -5618,7 +4619,7 @@
       </p:sp>
       <p:sp>
         <p:nvSpPr>
-          <p:cNvPr id="24" name="TextBox 23"/>
+          <p:cNvPr id="13" name="TextBox 12"/>
           <p:cNvSpPr txBox="1"/>
           <p:nvPr/>
         </p:nvSpPr>
@@ -5671,7 +4672,7 @@
       </p:sp>
       <p:sp>
         <p:nvSpPr>
-          <p:cNvPr id="25" name="카드 3"/>
+          <p:cNvPr id="14" name="카드 3"/>
           <p:cNvSpPr/>
           <p:nvPr/>
         </p:nvSpPr>
@@ -5704,7 +4705,7 @@
       </p:sp>
       <p:sp>
         <p:nvSpPr>
-          <p:cNvPr id="26" name="번호 3"/>
+          <p:cNvPr id="15" name="번호 3"/>
           <p:cNvSpPr/>
           <p:nvPr/>
         </p:nvSpPr>
@@ -5747,7 +4748,7 @@
       </p:sp>
       <p:sp>
         <p:nvSpPr>
-          <p:cNvPr id="27" name="TextBox 26"/>
+          <p:cNvPr id="16" name="TextBox 15"/>
           <p:cNvSpPr txBox="1"/>
           <p:nvPr/>
         </p:nvSpPr>
@@ -5785,7 +4786,7 @@
       </p:sp>
       <p:sp>
         <p:nvSpPr>
-          <p:cNvPr id="28" name="TextBox 27"/>
+          <p:cNvPr id="17" name="TextBox 16"/>
           <p:cNvSpPr txBox="1"/>
           <p:nvPr/>
         </p:nvSpPr>
@@ -5922,325 +4923,6 @@
       </p:sp>
       <p:sp>
         <p:nvSpPr>
-          <p:cNvPr id="5" name="장식"/>
-          <p:cNvSpPr/>
-          <p:nvPr/>
-        </p:nvSpPr>
-        <p:spPr>
-          <a:xfrm>
-            <a:off x="10914538" y="631759"/>
-            <a:ext cx="185261" cy="185261"/>
-          </a:xfrm>
-          <a:prstGeom prst="ellipse">
-            <a:avLst/>
-          </a:prstGeom>
-          <a:solidFill>
-            <a:srgbClr val="995229"/>
-          </a:solidFill>
-          <a:ln>
-            <a:noFill/>
-          </a:ln>
-        </p:spPr>
-        <p:txBody>
-          <a:bodyPr rtlCol="0" anchor="ctr"/>
-          <a:lstStyle/>
-          <a:p>
-            <a:pPr algn="ctr"/>
-          </a:p>
-        </p:txBody>
-      </p:sp>
-      <p:sp>
-        <p:nvSpPr>
-          <p:cNvPr id="6" name="장식"/>
-          <p:cNvSpPr/>
-          <p:nvPr/>
-        </p:nvSpPr>
-        <p:spPr>
-          <a:xfrm>
-            <a:off x="11491036" y="1099893"/>
-            <a:ext cx="111201" cy="111201"/>
-          </a:xfrm>
-          <a:prstGeom prst="ellipse">
-            <a:avLst/>
-          </a:prstGeom>
-          <a:solidFill>
-            <a:srgbClr val="F4DBCD"/>
-          </a:solidFill>
-          <a:ln>
-            <a:noFill/>
-          </a:ln>
-        </p:spPr>
-        <p:txBody>
-          <a:bodyPr rtlCol="0" anchor="ctr"/>
-          <a:lstStyle/>
-          <a:p>
-            <a:pPr algn="ctr"/>
-          </a:p>
-        </p:txBody>
-      </p:sp>
-      <p:sp>
-        <p:nvSpPr>
-          <p:cNvPr id="7" name="장식"/>
-          <p:cNvSpPr/>
-          <p:nvPr/>
-        </p:nvSpPr>
-        <p:spPr>
-          <a:xfrm>
-            <a:off x="10506607" y="843400"/>
-            <a:ext cx="146404" cy="146404"/>
-          </a:xfrm>
-          <a:prstGeom prst="ellipse">
-            <a:avLst/>
-          </a:prstGeom>
-          <a:solidFill>
-            <a:srgbClr val="3B9185"/>
-          </a:solidFill>
-          <a:ln>
-            <a:noFill/>
-          </a:ln>
-        </p:spPr>
-        <p:txBody>
-          <a:bodyPr rtlCol="0" anchor="ctr"/>
-          <a:lstStyle/>
-          <a:p>
-            <a:pPr algn="ctr"/>
-          </a:p>
-        </p:txBody>
-      </p:sp>
-      <p:sp>
-        <p:nvSpPr>
-          <p:cNvPr id="8" name="장식"/>
-          <p:cNvSpPr/>
-          <p:nvPr/>
-        </p:nvSpPr>
-        <p:spPr>
-          <a:xfrm>
-            <a:off x="11198146" y="619708"/>
-            <a:ext cx="120275" cy="120275"/>
-          </a:xfrm>
-          <a:prstGeom prst="ellipse">
-            <a:avLst/>
-          </a:prstGeom>
-          <a:solidFill>
-            <a:srgbClr val="995229"/>
-          </a:solidFill>
-          <a:ln>
-            <a:noFill/>
-          </a:ln>
-        </p:spPr>
-        <p:txBody>
-          <a:bodyPr rtlCol="0" anchor="ctr"/>
-          <a:lstStyle/>
-          <a:p>
-            <a:pPr algn="ctr"/>
-          </a:p>
-        </p:txBody>
-      </p:sp>
-      <p:sp>
-        <p:nvSpPr>
-          <p:cNvPr id="9" name="장식"/>
-          <p:cNvSpPr/>
-          <p:nvPr/>
-        </p:nvSpPr>
-        <p:spPr>
-          <a:xfrm>
-            <a:off x="11033527" y="398225"/>
-            <a:ext cx="186017" cy="186017"/>
-          </a:xfrm>
-          <a:prstGeom prst="ellipse">
-            <a:avLst/>
-          </a:prstGeom>
-          <a:solidFill>
-            <a:srgbClr val="F4DBCD"/>
-          </a:solidFill>
-          <a:ln>
-            <a:noFill/>
-          </a:ln>
-        </p:spPr>
-        <p:txBody>
-          <a:bodyPr rtlCol="0" anchor="ctr"/>
-          <a:lstStyle/>
-          <a:p>
-            <a:pPr algn="ctr"/>
-          </a:p>
-        </p:txBody>
-      </p:sp>
-      <p:sp>
-        <p:nvSpPr>
-          <p:cNvPr id="10" name="장식"/>
-          <p:cNvSpPr/>
-          <p:nvPr/>
-        </p:nvSpPr>
-        <p:spPr>
-          <a:xfrm>
-            <a:off x="10682891" y="656597"/>
-            <a:ext cx="79826" cy="79826"/>
-          </a:xfrm>
-          <a:prstGeom prst="ellipse">
-            <a:avLst/>
-          </a:prstGeom>
-          <a:solidFill>
-            <a:srgbClr val="3B9185"/>
-          </a:solidFill>
-          <a:ln>
-            <a:noFill/>
-          </a:ln>
-        </p:spPr>
-        <p:txBody>
-          <a:bodyPr rtlCol="0" anchor="ctr"/>
-          <a:lstStyle/>
-          <a:p>
-            <a:pPr algn="ctr"/>
-          </a:p>
-        </p:txBody>
-      </p:sp>
-      <p:sp>
-        <p:nvSpPr>
-          <p:cNvPr id="11" name="장식"/>
-          <p:cNvSpPr/>
-          <p:nvPr/>
-        </p:nvSpPr>
-        <p:spPr>
-          <a:xfrm>
-            <a:off x="11301345" y="1367190"/>
-            <a:ext cx="158557" cy="158557"/>
-          </a:xfrm>
-          <a:prstGeom prst="ellipse">
-            <a:avLst/>
-          </a:prstGeom>
-          <a:solidFill>
-            <a:srgbClr val="995229"/>
-          </a:solidFill>
-          <a:ln>
-            <a:noFill/>
-          </a:ln>
-        </p:spPr>
-        <p:txBody>
-          <a:bodyPr rtlCol="0" anchor="ctr"/>
-          <a:lstStyle/>
-          <a:p>
-            <a:pPr algn="ctr"/>
-          </a:p>
-        </p:txBody>
-      </p:sp>
-      <p:sp>
-        <p:nvSpPr>
-          <p:cNvPr id="12" name="장식"/>
-          <p:cNvSpPr/>
-          <p:nvPr/>
-        </p:nvSpPr>
-        <p:spPr>
-          <a:xfrm>
-            <a:off x="11059707" y="707976"/>
-            <a:ext cx="148776" cy="148776"/>
-          </a:xfrm>
-          <a:prstGeom prst="ellipse">
-            <a:avLst/>
-          </a:prstGeom>
-          <a:solidFill>
-            <a:srgbClr val="F4DBCD"/>
-          </a:solidFill>
-          <a:ln>
-            <a:noFill/>
-          </a:ln>
-        </p:spPr>
-        <p:txBody>
-          <a:bodyPr rtlCol="0" anchor="ctr"/>
-          <a:lstStyle/>
-          <a:p>
-            <a:pPr algn="ctr"/>
-          </a:p>
-        </p:txBody>
-      </p:sp>
-      <p:sp>
-        <p:nvSpPr>
-          <p:cNvPr id="13" name="장식"/>
-          <p:cNvSpPr/>
-          <p:nvPr/>
-        </p:nvSpPr>
-        <p:spPr>
-          <a:xfrm>
-            <a:off x="11352247" y="1000807"/>
-            <a:ext cx="157967" cy="157967"/>
-          </a:xfrm>
-          <a:prstGeom prst="ellipse">
-            <a:avLst/>
-          </a:prstGeom>
-          <a:solidFill>
-            <a:srgbClr val="3B9185"/>
-          </a:solidFill>
-          <a:ln>
-            <a:noFill/>
-          </a:ln>
-        </p:spPr>
-        <p:txBody>
-          <a:bodyPr rtlCol="0" anchor="ctr"/>
-          <a:lstStyle/>
-          <a:p>
-            <a:pPr algn="ctr"/>
-          </a:p>
-        </p:txBody>
-      </p:sp>
-      <p:sp>
-        <p:nvSpPr>
-          <p:cNvPr id="14" name="장식"/>
-          <p:cNvSpPr/>
-          <p:nvPr/>
-        </p:nvSpPr>
-        <p:spPr>
-          <a:xfrm>
-            <a:off x="10751978" y="615189"/>
-            <a:ext cx="100367" cy="100367"/>
-          </a:xfrm>
-          <a:prstGeom prst="ellipse">
-            <a:avLst/>
-          </a:prstGeom>
-          <a:solidFill>
-            <a:srgbClr val="995229"/>
-          </a:solidFill>
-          <a:ln>
-            <a:noFill/>
-          </a:ln>
-        </p:spPr>
-        <p:txBody>
-          <a:bodyPr rtlCol="0" anchor="ctr"/>
-          <a:lstStyle/>
-          <a:p>
-            <a:pPr algn="ctr"/>
-          </a:p>
-        </p:txBody>
-      </p:sp>
-      <p:sp>
-        <p:nvSpPr>
-          <p:cNvPr id="15" name="장식"/>
-          <p:cNvSpPr/>
-          <p:nvPr/>
-        </p:nvSpPr>
-        <p:spPr>
-          <a:xfrm>
-            <a:off x="10594948" y="721318"/>
-            <a:ext cx="69230" cy="69230"/>
-          </a:xfrm>
-          <a:prstGeom prst="ellipse">
-            <a:avLst/>
-          </a:prstGeom>
-          <a:solidFill>
-            <a:srgbClr val="F4DBCD"/>
-          </a:solidFill>
-          <a:ln>
-            <a:noFill/>
-          </a:ln>
-        </p:spPr>
-        <p:txBody>
-          <a:bodyPr rtlCol="0" anchor="ctr"/>
-          <a:lstStyle/>
-          <a:p>
-            <a:pPr algn="ctr"/>
-          </a:p>
-        </p:txBody>
-      </p:sp>
-      <p:sp>
-        <p:nvSpPr>
           <p:cNvPr id="2" name="Title 1"/>
           <p:cNvSpPr>
             <a:spLocks noGrp="1"/>
@@ -6279,7 +4961,7 @@
       </p:sp>
       <p:sp>
         <p:nvSpPr>
-          <p:cNvPr id="16" name="왼쪽 칸"/>
+          <p:cNvPr id="5" name="왼쪽 칸"/>
           <p:cNvSpPr/>
           <p:nvPr/>
         </p:nvSpPr>
@@ -6312,7 +4994,7 @@
       </p:sp>
       <p:sp>
         <p:nvSpPr>
-          <p:cNvPr id="17" name="칸 제목 바"/>
+          <p:cNvPr id="6" name="칸 제목 바"/>
           <p:cNvSpPr/>
           <p:nvPr/>
         </p:nvSpPr>
@@ -6343,7 +5025,7 @@
       </p:sp>
       <p:sp>
         <p:nvSpPr>
-          <p:cNvPr id="18" name="TextBox 17"/>
+          <p:cNvPr id="7" name="TextBox 6"/>
           <p:cNvSpPr txBox="1"/>
           <p:nvPr/>
         </p:nvSpPr>
@@ -6381,7 +5063,7 @@
       </p:sp>
       <p:sp>
         <p:nvSpPr>
-          <p:cNvPr id="19" name="TextBox 18"/>
+          <p:cNvPr id="8" name="TextBox 7"/>
           <p:cNvSpPr txBox="1"/>
           <p:nvPr/>
         </p:nvSpPr>
@@ -6464,7 +5146,7 @@
       </p:sp>
       <p:sp>
         <p:nvSpPr>
-          <p:cNvPr id="20" name="오른쪽 칸"/>
+          <p:cNvPr id="9" name="오른쪽 칸"/>
           <p:cNvSpPr/>
           <p:nvPr/>
         </p:nvSpPr>
@@ -6497,7 +5179,7 @@
       </p:sp>
       <p:sp>
         <p:nvSpPr>
-          <p:cNvPr id="21" name="칸 제목 바"/>
+          <p:cNvPr id="10" name="칸 제목 바"/>
           <p:cNvSpPr/>
           <p:nvPr/>
         </p:nvSpPr>
@@ -6528,7 +5210,7 @@
       </p:sp>
       <p:sp>
         <p:nvSpPr>
-          <p:cNvPr id="22" name="TextBox 21"/>
+          <p:cNvPr id="11" name="TextBox 10"/>
           <p:cNvSpPr txBox="1"/>
           <p:nvPr/>
         </p:nvSpPr>
@@ -6566,7 +5248,7 @@
       </p:sp>
       <p:sp>
         <p:nvSpPr>
-          <p:cNvPr id="23" name="TextBox 22"/>
+          <p:cNvPr id="12" name="TextBox 11"/>
           <p:cNvSpPr txBox="1"/>
           <p:nvPr/>
         </p:nvSpPr>
@@ -6733,325 +5415,6 @@
       </p:sp>
       <p:sp>
         <p:nvSpPr>
-          <p:cNvPr id="5" name="장식"/>
-          <p:cNvSpPr/>
-          <p:nvPr/>
-        </p:nvSpPr>
-        <p:spPr>
-          <a:xfrm>
-            <a:off x="10914538" y="631759"/>
-            <a:ext cx="185261" cy="185261"/>
-          </a:xfrm>
-          <a:prstGeom prst="ellipse">
-            <a:avLst/>
-          </a:prstGeom>
-          <a:solidFill>
-            <a:srgbClr val="995229"/>
-          </a:solidFill>
-          <a:ln>
-            <a:noFill/>
-          </a:ln>
-        </p:spPr>
-        <p:txBody>
-          <a:bodyPr rtlCol="0" anchor="ctr"/>
-          <a:lstStyle/>
-          <a:p>
-            <a:pPr algn="ctr"/>
-          </a:p>
-        </p:txBody>
-      </p:sp>
-      <p:sp>
-        <p:nvSpPr>
-          <p:cNvPr id="6" name="장식"/>
-          <p:cNvSpPr/>
-          <p:nvPr/>
-        </p:nvSpPr>
-        <p:spPr>
-          <a:xfrm>
-            <a:off x="11491036" y="1099893"/>
-            <a:ext cx="111201" cy="111201"/>
-          </a:xfrm>
-          <a:prstGeom prst="ellipse">
-            <a:avLst/>
-          </a:prstGeom>
-          <a:solidFill>
-            <a:srgbClr val="F4DBCD"/>
-          </a:solidFill>
-          <a:ln>
-            <a:noFill/>
-          </a:ln>
-        </p:spPr>
-        <p:txBody>
-          <a:bodyPr rtlCol="0" anchor="ctr"/>
-          <a:lstStyle/>
-          <a:p>
-            <a:pPr algn="ctr"/>
-          </a:p>
-        </p:txBody>
-      </p:sp>
-      <p:sp>
-        <p:nvSpPr>
-          <p:cNvPr id="7" name="장식"/>
-          <p:cNvSpPr/>
-          <p:nvPr/>
-        </p:nvSpPr>
-        <p:spPr>
-          <a:xfrm>
-            <a:off x="10506607" y="843400"/>
-            <a:ext cx="146404" cy="146404"/>
-          </a:xfrm>
-          <a:prstGeom prst="ellipse">
-            <a:avLst/>
-          </a:prstGeom>
-          <a:solidFill>
-            <a:srgbClr val="3B9185"/>
-          </a:solidFill>
-          <a:ln>
-            <a:noFill/>
-          </a:ln>
-        </p:spPr>
-        <p:txBody>
-          <a:bodyPr rtlCol="0" anchor="ctr"/>
-          <a:lstStyle/>
-          <a:p>
-            <a:pPr algn="ctr"/>
-          </a:p>
-        </p:txBody>
-      </p:sp>
-      <p:sp>
-        <p:nvSpPr>
-          <p:cNvPr id="8" name="장식"/>
-          <p:cNvSpPr/>
-          <p:nvPr/>
-        </p:nvSpPr>
-        <p:spPr>
-          <a:xfrm>
-            <a:off x="11198146" y="619708"/>
-            <a:ext cx="120275" cy="120275"/>
-          </a:xfrm>
-          <a:prstGeom prst="ellipse">
-            <a:avLst/>
-          </a:prstGeom>
-          <a:solidFill>
-            <a:srgbClr val="995229"/>
-          </a:solidFill>
-          <a:ln>
-            <a:noFill/>
-          </a:ln>
-        </p:spPr>
-        <p:txBody>
-          <a:bodyPr rtlCol="0" anchor="ctr"/>
-          <a:lstStyle/>
-          <a:p>
-            <a:pPr algn="ctr"/>
-          </a:p>
-        </p:txBody>
-      </p:sp>
-      <p:sp>
-        <p:nvSpPr>
-          <p:cNvPr id="9" name="장식"/>
-          <p:cNvSpPr/>
-          <p:nvPr/>
-        </p:nvSpPr>
-        <p:spPr>
-          <a:xfrm>
-            <a:off x="11033527" y="398225"/>
-            <a:ext cx="186017" cy="186017"/>
-          </a:xfrm>
-          <a:prstGeom prst="ellipse">
-            <a:avLst/>
-          </a:prstGeom>
-          <a:solidFill>
-            <a:srgbClr val="F4DBCD"/>
-          </a:solidFill>
-          <a:ln>
-            <a:noFill/>
-          </a:ln>
-        </p:spPr>
-        <p:txBody>
-          <a:bodyPr rtlCol="0" anchor="ctr"/>
-          <a:lstStyle/>
-          <a:p>
-            <a:pPr algn="ctr"/>
-          </a:p>
-        </p:txBody>
-      </p:sp>
-      <p:sp>
-        <p:nvSpPr>
-          <p:cNvPr id="10" name="장식"/>
-          <p:cNvSpPr/>
-          <p:nvPr/>
-        </p:nvSpPr>
-        <p:spPr>
-          <a:xfrm>
-            <a:off x="10682891" y="656597"/>
-            <a:ext cx="79826" cy="79826"/>
-          </a:xfrm>
-          <a:prstGeom prst="ellipse">
-            <a:avLst/>
-          </a:prstGeom>
-          <a:solidFill>
-            <a:srgbClr val="3B9185"/>
-          </a:solidFill>
-          <a:ln>
-            <a:noFill/>
-          </a:ln>
-        </p:spPr>
-        <p:txBody>
-          <a:bodyPr rtlCol="0" anchor="ctr"/>
-          <a:lstStyle/>
-          <a:p>
-            <a:pPr algn="ctr"/>
-          </a:p>
-        </p:txBody>
-      </p:sp>
-      <p:sp>
-        <p:nvSpPr>
-          <p:cNvPr id="11" name="장식"/>
-          <p:cNvSpPr/>
-          <p:nvPr/>
-        </p:nvSpPr>
-        <p:spPr>
-          <a:xfrm>
-            <a:off x="11301345" y="1367190"/>
-            <a:ext cx="158557" cy="158557"/>
-          </a:xfrm>
-          <a:prstGeom prst="ellipse">
-            <a:avLst/>
-          </a:prstGeom>
-          <a:solidFill>
-            <a:srgbClr val="995229"/>
-          </a:solidFill>
-          <a:ln>
-            <a:noFill/>
-          </a:ln>
-        </p:spPr>
-        <p:txBody>
-          <a:bodyPr rtlCol="0" anchor="ctr"/>
-          <a:lstStyle/>
-          <a:p>
-            <a:pPr algn="ctr"/>
-          </a:p>
-        </p:txBody>
-      </p:sp>
-      <p:sp>
-        <p:nvSpPr>
-          <p:cNvPr id="12" name="장식"/>
-          <p:cNvSpPr/>
-          <p:nvPr/>
-        </p:nvSpPr>
-        <p:spPr>
-          <a:xfrm>
-            <a:off x="11059707" y="707976"/>
-            <a:ext cx="148776" cy="148776"/>
-          </a:xfrm>
-          <a:prstGeom prst="ellipse">
-            <a:avLst/>
-          </a:prstGeom>
-          <a:solidFill>
-            <a:srgbClr val="F4DBCD"/>
-          </a:solidFill>
-          <a:ln>
-            <a:noFill/>
-          </a:ln>
-        </p:spPr>
-        <p:txBody>
-          <a:bodyPr rtlCol="0" anchor="ctr"/>
-          <a:lstStyle/>
-          <a:p>
-            <a:pPr algn="ctr"/>
-          </a:p>
-        </p:txBody>
-      </p:sp>
-      <p:sp>
-        <p:nvSpPr>
-          <p:cNvPr id="13" name="장식"/>
-          <p:cNvSpPr/>
-          <p:nvPr/>
-        </p:nvSpPr>
-        <p:spPr>
-          <a:xfrm>
-            <a:off x="11352247" y="1000807"/>
-            <a:ext cx="157967" cy="157967"/>
-          </a:xfrm>
-          <a:prstGeom prst="ellipse">
-            <a:avLst/>
-          </a:prstGeom>
-          <a:solidFill>
-            <a:srgbClr val="3B9185"/>
-          </a:solidFill>
-          <a:ln>
-            <a:noFill/>
-          </a:ln>
-        </p:spPr>
-        <p:txBody>
-          <a:bodyPr rtlCol="0" anchor="ctr"/>
-          <a:lstStyle/>
-          <a:p>
-            <a:pPr algn="ctr"/>
-          </a:p>
-        </p:txBody>
-      </p:sp>
-      <p:sp>
-        <p:nvSpPr>
-          <p:cNvPr id="14" name="장식"/>
-          <p:cNvSpPr/>
-          <p:nvPr/>
-        </p:nvSpPr>
-        <p:spPr>
-          <a:xfrm>
-            <a:off x="10751978" y="615189"/>
-            <a:ext cx="100367" cy="100367"/>
-          </a:xfrm>
-          <a:prstGeom prst="ellipse">
-            <a:avLst/>
-          </a:prstGeom>
-          <a:solidFill>
-            <a:srgbClr val="995229"/>
-          </a:solidFill>
-          <a:ln>
-            <a:noFill/>
-          </a:ln>
-        </p:spPr>
-        <p:txBody>
-          <a:bodyPr rtlCol="0" anchor="ctr"/>
-          <a:lstStyle/>
-          <a:p>
-            <a:pPr algn="ctr"/>
-          </a:p>
-        </p:txBody>
-      </p:sp>
-      <p:sp>
-        <p:nvSpPr>
-          <p:cNvPr id="15" name="장식"/>
-          <p:cNvSpPr/>
-          <p:nvPr/>
-        </p:nvSpPr>
-        <p:spPr>
-          <a:xfrm>
-            <a:off x="10594948" y="721318"/>
-            <a:ext cx="69230" cy="69230"/>
-          </a:xfrm>
-          <a:prstGeom prst="ellipse">
-            <a:avLst/>
-          </a:prstGeom>
-          <a:solidFill>
-            <a:srgbClr val="F4DBCD"/>
-          </a:solidFill>
-          <a:ln>
-            <a:noFill/>
-          </a:ln>
-        </p:spPr>
-        <p:txBody>
-          <a:bodyPr rtlCol="0" anchor="ctr"/>
-          <a:lstStyle/>
-          <a:p>
-            <a:pPr algn="ctr"/>
-          </a:p>
-        </p:txBody>
-      </p:sp>
-      <p:sp>
-        <p:nvSpPr>
           <p:cNvPr id="2" name="Title 1"/>
           <p:cNvSpPr>
             <a:spLocks noGrp="1"/>
@@ -7090,7 +5453,7 @@
       </p:sp>
       <p:graphicFrame>
         <p:nvGraphicFramePr>
-          <p:cNvPr id="16" name="표"/>
+          <p:cNvPr id="5" name="표"/>
           <p:cNvGraphicFramePr>
             <a:graphicFrameLocks noGrp="1"/>
           </p:cNvGraphicFramePr>
@@ -8243,14 +6606,6 @@
 <file path=ppt/slides/slide6.xml><?xml version="1.0" encoding="utf-8"?>
 <p:sld xmlns:a="http://schemas.openxmlformats.org/drawingml/2006/main" xmlns:p="http://schemas.openxmlformats.org/presentationml/2006/main" xmlns:r="http://schemas.openxmlformats.org/officeDocument/2006/relationships">
   <p:cSld>
-    <p:bg>
-      <p:bgPr>
-        <a:solidFill>
-          <a:srgbClr val="FBF3EF"/>
-        </a:solidFill>
-        <a:effectLst/>
-      </p:bgPr>
-    </p:bg>
     <p:spTree>
       <p:nvGrpSpPr>
         <p:cNvPr id="1" name=""/>
@@ -8258,383 +6613,30 @@
         <p:nvPr/>
       </p:nvGrpSpPr>
       <p:grpSpPr/>
-      <p:sp>
-        <p:nvSpPr>
-          <p:cNvPr id="3" name="장식"/>
-          <p:cNvSpPr/>
+      <p:pic>
+        <p:nvPicPr>
+          <p:cNvPr id="3" name="표지 그림" descr="talk-38.jpg"/>
+          <p:cNvPicPr>
+            <a:picLocks noChangeAspect="1"/>
+          </p:cNvPicPr>
           <p:nvPr/>
-        </p:nvSpPr>
-        <p:spPr>
-          <a:xfrm>
-            <a:off x="274320" y="274320"/>
-            <a:ext cx="11643055" cy="6309360"/>
+        </p:nvPicPr>
+        <p:blipFill>
+          <a:blip r:embed="rId2"/>
+          <a:stretch>
+            <a:fillRect/>
+          </a:stretch>
+        </p:blipFill>
+        <p:spPr>
+          <a:xfrm>
+            <a:off x="0" y="0"/>
+            <a:ext cx="12191695" cy="6858000"/>
           </a:xfrm>
           <a:prstGeom prst="rect">
             <a:avLst/>
           </a:prstGeom>
-          <a:noFill/>
-          <a:ln w="38100">
-            <a:solidFill>
-              <a:srgbClr val="995229"/>
-            </a:solidFill>
-          </a:ln>
-        </p:spPr>
-        <p:txBody>
-          <a:bodyPr rtlCol="0" anchor="ctr"/>
-          <a:lstStyle/>
-          <a:p>
-            <a:pPr algn="ctr"/>
-          </a:p>
-        </p:txBody>
-      </p:sp>
-      <p:sp>
-        <p:nvSpPr>
-          <p:cNvPr id="4" name="장식"/>
-          <p:cNvSpPr/>
-          <p:nvPr/>
-        </p:nvSpPr>
-        <p:spPr>
-          <a:xfrm>
-            <a:off x="457200" y="457200"/>
-            <a:ext cx="11277295" cy="5943600"/>
-          </a:xfrm>
-          <a:prstGeom prst="rect">
-            <a:avLst/>
-          </a:prstGeom>
-          <a:noFill/>
-          <a:ln w="12700">
-            <a:solidFill>
-              <a:srgbClr val="F4DBCD"/>
-            </a:solidFill>
-          </a:ln>
-        </p:spPr>
-        <p:txBody>
-          <a:bodyPr rtlCol="0" anchor="ctr"/>
-          <a:lstStyle/>
-          <a:p>
-            <a:pPr algn="ctr"/>
-          </a:p>
-        </p:txBody>
-      </p:sp>
-      <p:sp>
-        <p:nvSpPr>
-          <p:cNvPr id="5" name="장식"/>
-          <p:cNvSpPr/>
-          <p:nvPr/>
-        </p:nvSpPr>
-        <p:spPr>
-          <a:xfrm>
-            <a:off x="5854364" y="780551"/>
-            <a:ext cx="333470" cy="333470"/>
-          </a:xfrm>
-          <a:prstGeom prst="ellipse">
-            <a:avLst/>
-          </a:prstGeom>
-          <a:solidFill>
-            <a:srgbClr val="995229"/>
-          </a:solidFill>
-          <a:ln>
-            <a:noFill/>
-          </a:ln>
-        </p:spPr>
-        <p:txBody>
-          <a:bodyPr rtlCol="0" anchor="ctr"/>
-          <a:lstStyle/>
-          <a:p>
-            <a:pPr algn="ctr"/>
-          </a:p>
-        </p:txBody>
-      </p:sp>
-      <p:sp>
-        <p:nvSpPr>
-          <p:cNvPr id="6" name="장식"/>
-          <p:cNvSpPr/>
-          <p:nvPr/>
-        </p:nvSpPr>
-        <p:spPr>
-          <a:xfrm>
-            <a:off x="6892061" y="1623191"/>
-            <a:ext cx="200163" cy="200163"/>
-          </a:xfrm>
-          <a:prstGeom prst="ellipse">
-            <a:avLst/>
-          </a:prstGeom>
-          <a:solidFill>
-            <a:srgbClr val="F4DBCD"/>
-          </a:solidFill>
-          <a:ln>
-            <a:noFill/>
-          </a:ln>
-        </p:spPr>
-        <p:txBody>
-          <a:bodyPr rtlCol="0" anchor="ctr"/>
-          <a:lstStyle/>
-          <a:p>
-            <a:pPr algn="ctr"/>
-          </a:p>
-        </p:txBody>
-      </p:sp>
-      <p:sp>
-        <p:nvSpPr>
-          <p:cNvPr id="7" name="장식"/>
-          <p:cNvSpPr/>
-          <p:nvPr/>
-        </p:nvSpPr>
-        <p:spPr>
-          <a:xfrm>
-            <a:off x="5120089" y="1161505"/>
-            <a:ext cx="263527" cy="263527"/>
-          </a:xfrm>
-          <a:prstGeom prst="ellipse">
-            <a:avLst/>
-          </a:prstGeom>
-          <a:solidFill>
-            <a:srgbClr val="3B9185"/>
-          </a:solidFill>
-          <a:ln>
-            <a:noFill/>
-          </a:ln>
-        </p:spPr>
-        <p:txBody>
-          <a:bodyPr rtlCol="0" anchor="ctr"/>
-          <a:lstStyle/>
-          <a:p>
-            <a:pPr algn="ctr"/>
-          </a:p>
-        </p:txBody>
-      </p:sp>
-      <p:sp>
-        <p:nvSpPr>
-          <p:cNvPr id="8" name="장식"/>
-          <p:cNvSpPr/>
-          <p:nvPr/>
-        </p:nvSpPr>
-        <p:spPr>
-          <a:xfrm>
-            <a:off x="6364859" y="758859"/>
-            <a:ext cx="216496" cy="216496"/>
-          </a:xfrm>
-          <a:prstGeom prst="ellipse">
-            <a:avLst/>
-          </a:prstGeom>
-          <a:solidFill>
-            <a:srgbClr val="995229"/>
-          </a:solidFill>
-          <a:ln>
-            <a:noFill/>
-          </a:ln>
-        </p:spPr>
-        <p:txBody>
-          <a:bodyPr rtlCol="0" anchor="ctr"/>
-          <a:lstStyle/>
-          <a:p>
-            <a:pPr algn="ctr"/>
-          </a:p>
-        </p:txBody>
-      </p:sp>
-      <p:sp>
-        <p:nvSpPr>
-          <p:cNvPr id="9" name="장식"/>
-          <p:cNvSpPr/>
-          <p:nvPr/>
-        </p:nvSpPr>
-        <p:spPr>
-          <a:xfrm>
-            <a:off x="6068545" y="360190"/>
-            <a:ext cx="334832" cy="334832"/>
-          </a:xfrm>
-          <a:prstGeom prst="ellipse">
-            <a:avLst/>
-          </a:prstGeom>
-          <a:solidFill>
-            <a:srgbClr val="F4DBCD"/>
-          </a:solidFill>
-          <a:ln>
-            <a:noFill/>
-          </a:ln>
-        </p:spPr>
-        <p:txBody>
-          <a:bodyPr rtlCol="0" anchor="ctr"/>
-          <a:lstStyle/>
-          <a:p>
-            <a:pPr algn="ctr"/>
-          </a:p>
-        </p:txBody>
-      </p:sp>
-      <p:sp>
-        <p:nvSpPr>
-          <p:cNvPr id="10" name="장식"/>
-          <p:cNvSpPr/>
-          <p:nvPr/>
-        </p:nvSpPr>
-        <p:spPr>
-          <a:xfrm>
-            <a:off x="5437401" y="825259"/>
-            <a:ext cx="143688" cy="143688"/>
-          </a:xfrm>
-          <a:prstGeom prst="ellipse">
-            <a:avLst/>
-          </a:prstGeom>
-          <a:solidFill>
-            <a:srgbClr val="3B9185"/>
-          </a:solidFill>
-          <a:ln>
-            <a:noFill/>
-          </a:ln>
-        </p:spPr>
-        <p:txBody>
-          <a:bodyPr rtlCol="0" anchor="ctr"/>
-          <a:lstStyle/>
-          <a:p>
-            <a:pPr algn="ctr"/>
-          </a:p>
-        </p:txBody>
-      </p:sp>
-      <p:sp>
-        <p:nvSpPr>
-          <p:cNvPr id="11" name="장식"/>
-          <p:cNvSpPr/>
-          <p:nvPr/>
-        </p:nvSpPr>
-        <p:spPr>
-          <a:xfrm>
-            <a:off x="6550618" y="2104327"/>
-            <a:ext cx="285402" cy="285402"/>
-          </a:xfrm>
-          <a:prstGeom prst="ellipse">
-            <a:avLst/>
-          </a:prstGeom>
-          <a:solidFill>
-            <a:srgbClr val="995229"/>
-          </a:solidFill>
-          <a:ln>
-            <a:noFill/>
-          </a:ln>
-        </p:spPr>
-        <p:txBody>
-          <a:bodyPr rtlCol="0" anchor="ctr"/>
-          <a:lstStyle/>
-          <a:p>
-            <a:pPr algn="ctr"/>
-          </a:p>
-        </p:txBody>
-      </p:sp>
-      <p:sp>
-        <p:nvSpPr>
-          <p:cNvPr id="12" name="장식"/>
-          <p:cNvSpPr/>
-          <p:nvPr/>
-        </p:nvSpPr>
-        <p:spPr>
-          <a:xfrm>
-            <a:off x="6115670" y="917740"/>
-            <a:ext cx="267797" cy="267797"/>
-          </a:xfrm>
-          <a:prstGeom prst="ellipse">
-            <a:avLst/>
-          </a:prstGeom>
-          <a:solidFill>
-            <a:srgbClr val="F4DBCD"/>
-          </a:solidFill>
-          <a:ln>
-            <a:noFill/>
-          </a:ln>
-        </p:spPr>
-        <p:txBody>
-          <a:bodyPr rtlCol="0" anchor="ctr"/>
-          <a:lstStyle/>
-          <a:p>
-            <a:pPr algn="ctr"/>
-          </a:p>
-        </p:txBody>
-      </p:sp>
-      <p:sp>
-        <p:nvSpPr>
-          <p:cNvPr id="13" name="장식"/>
-          <p:cNvSpPr/>
-          <p:nvPr/>
-        </p:nvSpPr>
-        <p:spPr>
-          <a:xfrm>
-            <a:off x="6642241" y="1444838"/>
-            <a:ext cx="284342" cy="284342"/>
-          </a:xfrm>
-          <a:prstGeom prst="ellipse">
-            <a:avLst/>
-          </a:prstGeom>
-          <a:solidFill>
-            <a:srgbClr val="3B9185"/>
-          </a:solidFill>
-          <a:ln>
-            <a:noFill/>
-          </a:ln>
-        </p:spPr>
-        <p:txBody>
-          <a:bodyPr rtlCol="0" anchor="ctr"/>
-          <a:lstStyle/>
-          <a:p>
-            <a:pPr algn="ctr"/>
-          </a:p>
-        </p:txBody>
-      </p:sp>
-      <p:sp>
-        <p:nvSpPr>
-          <p:cNvPr id="14" name="장식"/>
-          <p:cNvSpPr/>
-          <p:nvPr/>
-        </p:nvSpPr>
-        <p:spPr>
-          <a:xfrm>
-            <a:off x="5561757" y="750724"/>
-            <a:ext cx="180660" cy="180660"/>
-          </a:xfrm>
-          <a:prstGeom prst="ellipse">
-            <a:avLst/>
-          </a:prstGeom>
-          <a:solidFill>
-            <a:srgbClr val="995229"/>
-          </a:solidFill>
-          <a:ln>
-            <a:noFill/>
-          </a:ln>
-        </p:spPr>
-        <p:txBody>
-          <a:bodyPr rtlCol="0" anchor="ctr"/>
-          <a:lstStyle/>
-          <a:p>
-            <a:pPr algn="ctr"/>
-          </a:p>
-        </p:txBody>
-      </p:sp>
-      <p:sp>
-        <p:nvSpPr>
-          <p:cNvPr id="15" name="장식"/>
-          <p:cNvSpPr/>
-          <p:nvPr/>
-        </p:nvSpPr>
-        <p:spPr>
-          <a:xfrm>
-            <a:off x="5279103" y="941758"/>
-            <a:ext cx="124614" cy="124614"/>
-          </a:xfrm>
-          <a:prstGeom prst="ellipse">
-            <a:avLst/>
-          </a:prstGeom>
-          <a:solidFill>
-            <a:srgbClr val="F4DBCD"/>
-          </a:solidFill>
-          <a:ln>
-            <a:noFill/>
-          </a:ln>
-        </p:spPr>
-        <p:txBody>
-          <a:bodyPr rtlCol="0" anchor="ctr"/>
-          <a:lstStyle/>
-          <a:p>
-            <a:pPr algn="ctr"/>
-          </a:p>
-        </p:txBody>
-      </p:sp>
+        </p:spPr>
+      </p:pic>
       <p:sp>
         <p:nvSpPr>
           <p:cNvPr id="2" name="Title 1"/>
@@ -8647,8 +6649,8 @@
         </p:nvSpPr>
         <p:spPr>
           <a:xfrm>
-            <a:off x="1463003" y="2331720"/>
-            <a:ext cx="9265688" cy="1371600"/>
+            <a:off x="853418" y="2057400"/>
+            <a:ext cx="6095847" cy="1554480"/>
           </a:xfrm>
         </p:spPr>
         <p:txBody>
@@ -8657,7 +6659,7 @@
           </a:bodyPr>
           <a:lstStyle/>
           <a:p>
-            <a:pPr algn="ctr">
+            <a:pPr algn="l">
               <a:lnSpc>
                 <a:spcPct val="105000"/>
               </a:lnSpc>
@@ -8675,14 +6677,14 @@
       </p:sp>
       <p:sp>
         <p:nvSpPr>
-          <p:cNvPr id="16" name="한 줄 문구"/>
+          <p:cNvPr id="4" name="한 줄 문구"/>
           <p:cNvSpPr txBox="1"/>
           <p:nvPr/>
         </p:nvSpPr>
         <p:spPr>
           <a:xfrm>
-            <a:off x="1463003" y="3794760"/>
-            <a:ext cx="9265688" cy="822960"/>
+            <a:off x="853418" y="3749039"/>
+            <a:ext cx="6095847" cy="822960"/>
           </a:xfrm>
           <a:prstGeom prst="rect">
             <a:avLst/>
@@ -8695,7 +6697,7 @@
           </a:bodyPr>
           <a:lstStyle/>
           <a:p>
-            <a:pPr algn="ctr">
+            <a:pPr algn="l">
               <a:lnSpc>
                 <a:spcPct val="115000"/>
               </a:lnSpc>
@@ -8706,21 +6708,21 @@
                   <a:srgbClr val="492713"/>
                 </a:solidFill>
               </a:rPr>
-              <a:t>들어 주셔서 고맙습니다</a:t>
-            </a:r>
-          </a:p>
-        </p:txBody>
-      </p:sp>
-      <p:sp>
-        <p:nvSpPr>
-          <p:cNvPr id="17" name="안내 문구"/>
+              <a:t>끝까지 들어 주셔서 고맙습니다</a:t>
+            </a:r>
+          </a:p>
+        </p:txBody>
+      </p:sp>
+      <p:sp>
+        <p:nvSpPr>
+          <p:cNvPr id="5" name="안내 문구"/>
           <p:cNvSpPr txBox="1"/>
           <p:nvPr/>
         </p:nvSpPr>
         <p:spPr>
           <a:xfrm>
-            <a:off x="1463003" y="4663440"/>
-            <a:ext cx="9265688" cy="914400"/>
+            <a:off x="853418" y="4617720"/>
+            <a:ext cx="6095847" cy="914400"/>
           </a:xfrm>
           <a:prstGeom prst="rect">
             <a:avLst/>
@@ -8733,7 +6735,7 @@
           </a:bodyPr>
           <a:lstStyle/>
           <a:p>
-            <a:pPr algn="ctr">
+            <a:pPr algn="l">
               <a:lnSpc>
                 <a:spcPct val="115000"/>
               </a:lnSpc>

--- a/public/fun/pack/pptx/talk/발표템플릿_38_업무보고_군고구마골목.pptx
+++ b/public/fun/pack/pptx/talk/발표템플릿_38_업무보고_군고구마골목.pptx
@@ -3286,6 +3286,14 @@
 <file path=ppt/slides/slide1.xml><?xml version="1.0" encoding="utf-8"?>
 <p:sld xmlns:a="http://schemas.openxmlformats.org/drawingml/2006/main" xmlns:p="http://schemas.openxmlformats.org/presentationml/2006/main" xmlns:r="http://schemas.openxmlformats.org/officeDocument/2006/relationships">
   <p:cSld>
+    <p:bg>
+      <p:bgPr>
+        <a:solidFill>
+          <a:srgbClr val="F6E1D5"/>
+        </a:solidFill>
+        <a:effectLst/>
+      </p:bgPr>
+    </p:bg>
     <p:spTree>
       <p:nvGrpSpPr>
         <p:cNvPr id="1" name=""/>
@@ -3293,30 +3301,102 @@
         <p:nvPr/>
       </p:nvGrpSpPr>
       <p:grpSpPr/>
-      <p:pic>
-        <p:nvPicPr>
-          <p:cNvPr id="3" name="표지 그림" descr="talk-38.jpg"/>
-          <p:cNvPicPr>
-            <a:picLocks noChangeAspect="1"/>
-          </p:cNvPicPr>
+      <p:sp>
+        <p:nvSpPr>
+          <p:cNvPr id="3" name="장식"/>
+          <p:cNvSpPr/>
           <p:nvPr/>
-        </p:nvPicPr>
-        <p:blipFill>
-          <a:blip r:embed="rId2"/>
-          <a:stretch>
-            <a:fillRect/>
-          </a:stretch>
-        </p:blipFill>
+        </p:nvSpPr>
         <p:spPr>
           <a:xfrm>
             <a:off x="0" y="0"/>
-            <a:ext cx="12191695" cy="6858000"/>
+            <a:ext cx="12191695" cy="3154680"/>
           </a:xfrm>
           <a:prstGeom prst="rect">
             <a:avLst/>
           </a:prstGeom>
-        </p:spPr>
-      </p:pic>
+          <a:solidFill>
+            <a:srgbClr val="FFFFFF"/>
+          </a:solidFill>
+          <a:ln>
+            <a:noFill/>
+          </a:ln>
+        </p:spPr>
+        <p:txBody>
+          <a:bodyPr rtlCol="0" anchor="ctr"/>
+          <a:lstStyle/>
+          <a:p>
+            <a:pPr algn="ctr"/>
+          </a:p>
+        </p:txBody>
+      </p:sp>
+      <p:sp>
+        <p:nvSpPr>
+          <p:cNvPr id="4" name="장식"/>
+          <p:cNvSpPr/>
+          <p:nvPr/>
+        </p:nvSpPr>
+        <p:spPr>
+          <a:xfrm>
+            <a:off x="8778020" y="1965960"/>
+            <a:ext cx="2377440" cy="2377440"/>
+          </a:xfrm>
+          <a:prstGeom prst="ellipse">
+            <a:avLst/>
+          </a:prstGeom>
+          <a:solidFill>
+            <a:srgbClr val="EBC4AD"/>
+          </a:solidFill>
+          <a:ln>
+            <a:noFill/>
+          </a:ln>
+        </p:spPr>
+        <p:txBody>
+          <a:bodyPr rtlCol="0" anchor="ctr"/>
+          <a:lstStyle/>
+          <a:p>
+            <a:pPr algn="ctr"/>
+          </a:p>
+        </p:txBody>
+      </p:sp>
+      <p:sp>
+        <p:nvSpPr>
+          <p:cNvPr id="5" name="라벨"/>
+          <p:cNvSpPr txBox="1"/>
+          <p:nvPr/>
+        </p:nvSpPr>
+        <p:spPr>
+          <a:xfrm>
+            <a:off x="822960" y="3657600"/>
+            <a:ext cx="7315017" cy="274320"/>
+          </a:xfrm>
+          <a:prstGeom prst="rect">
+            <a:avLst/>
+          </a:prstGeom>
+          <a:noFill/>
+        </p:spPr>
+        <p:txBody>
+          <a:bodyPr wrap="square" lIns="54864" rIns="54864" tIns="27432" bIns="27432" anchor="t">
+            <a:noAutofit/>
+          </a:bodyPr>
+          <a:lstStyle/>
+          <a:p>
+            <a:pPr algn="l">
+              <a:lnSpc>
+                <a:spcPct val="115000"/>
+              </a:lnSpc>
+            </a:pPr>
+            <a:r>
+              <a:rPr sz="1000" b="1" i="0" spc="250">
+                <a:solidFill>
+                  <a:srgbClr val="26231F"/>
+                </a:solidFill>
+              </a:rPr>
+              <a:t>PRESENTATION</a:t>
+            </a:r>
+          </a:p>
+        </p:txBody>
+      </p:sp>
       <p:sp>
         <p:nvSpPr>
           <p:cNvPr id="2" name="Title 1"/>
@@ -3329,8 +3409,8 @@
         </p:nvSpPr>
         <p:spPr>
           <a:xfrm>
-            <a:off x="853418" y="2057400"/>
-            <a:ext cx="6095847" cy="1554480"/>
+            <a:off x="822960" y="4114800"/>
+            <a:ext cx="7315017" cy="1188720"/>
           </a:xfrm>
         </p:spPr>
         <p:txBody>
@@ -3345,9 +3425,9 @@
               </a:lnSpc>
             </a:pPr>
             <a:r>
-              <a:rPr sz="3600" b="1" i="0">
+              <a:rPr sz="4000" b="1" i="0">
                 <a:solidFill>
-                  <a:srgbClr val="492713"/>
+                  <a:srgbClr val="26231F"/>
                 </a:solidFill>
               </a:rPr>
               <a:t>발표 제목을 입력하세요</a:t>
@@ -3357,14 +3437,14 @@
       </p:sp>
       <p:sp>
         <p:nvSpPr>
-          <p:cNvPr id="4" name="한 줄 문구"/>
+          <p:cNvPr id="6" name="한 줄 문구"/>
           <p:cNvSpPr txBox="1"/>
           <p:nvPr/>
         </p:nvSpPr>
         <p:spPr>
           <a:xfrm>
-            <a:off x="853418" y="3749039"/>
-            <a:ext cx="6095847" cy="822960"/>
+            <a:off x="822960" y="5394960"/>
+            <a:ext cx="7315017" cy="822960"/>
           </a:xfrm>
           <a:prstGeom prst="rect">
             <a:avLst/>
@@ -3383,9 +3463,9 @@
               </a:lnSpc>
             </a:pPr>
             <a:r>
-              <a:rPr sz="1700" b="0" i="1">
+              <a:rPr sz="1700" b="0" i="0">
                 <a:solidFill>
-                  <a:srgbClr val="492713"/>
+                  <a:srgbClr val="26231F"/>
                 </a:solidFill>
               </a:rPr>
               <a:t>목표 대비 실적을 비교했습니다</a:t>
@@ -3395,14 +3475,14 @@
       </p:sp>
       <p:sp>
         <p:nvSpPr>
-          <p:cNvPr id="5" name="안내 문구"/>
+          <p:cNvPr id="7" name="안내 문구"/>
           <p:cNvSpPr txBox="1"/>
           <p:nvPr/>
         </p:nvSpPr>
         <p:spPr>
           <a:xfrm>
-            <a:off x="853418" y="4617720"/>
-            <a:ext cx="6095847" cy="914400"/>
+            <a:off x="822960" y="6263640"/>
+            <a:ext cx="7315017" cy="914400"/>
           </a:xfrm>
           <a:prstGeom prst="rect">
             <a:avLst/>
@@ -3423,7 +3503,7 @@
             <a:r>
               <a:rPr sz="1400" b="0" i="0">
                 <a:solidFill>
-                  <a:srgbClr val="666666"/>
+                  <a:srgbClr val="26231F"/>
                 </a:solidFill>
               </a:rPr>
               <a:t>업무 보고 · 발표자 이름</a:t>
@@ -3438,10 +3518,10 @@
             <a:r>
               <a:rPr sz="1400" b="0" i="0">
                 <a:solidFill>
-                  <a:srgbClr val="666666"/>
+                  <a:srgbClr val="26231F"/>
                 </a:solidFill>
               </a:rPr>
-              <a:t>2027. 00. 00</a:t>
+              <a:t>날짜 입력</a:t>
             </a:r>
           </a:p>
         </p:txBody>
@@ -3460,7 +3540,7 @@
     <p:bg>
       <p:bgPr>
         <a:solidFill>
-          <a:srgbClr val="FBF3EF"/>
+          <a:srgbClr val="FFFFFF"/>
         </a:solidFill>
         <a:effectLst/>
       </p:bgPr>
@@ -3480,46 +3560,113 @@
         </p:nvSpPr>
         <p:spPr>
           <a:xfrm>
-            <a:off x="256032" y="256032"/>
-            <a:ext cx="11679631" cy="6345936"/>
+            <a:off x="0" y="6565392"/>
+            <a:ext cx="12191695" cy="292608"/>
+          </a:xfrm>
+          <a:prstGeom prst="rect">
+            <a:avLst/>
+          </a:prstGeom>
+          <a:solidFill>
+            <a:srgbClr val="EBC4AD"/>
+          </a:solidFill>
+          <a:ln>
+            <a:noFill/>
+          </a:ln>
+        </p:spPr>
+        <p:txBody>
+          <a:bodyPr rtlCol="0" anchor="ctr"/>
+          <a:lstStyle/>
+          <a:p>
+            <a:pPr algn="ctr"/>
+          </a:p>
+        </p:txBody>
+      </p:sp>
+      <p:sp>
+        <p:nvSpPr>
+          <p:cNvPr id="4" name="장식"/>
+          <p:cNvSpPr/>
+          <p:nvPr/>
+        </p:nvSpPr>
+        <p:spPr>
+          <a:xfrm>
+            <a:off x="640080" y="6400800"/>
+            <a:ext cx="10911535" cy="10972"/>
+          </a:xfrm>
+          <a:prstGeom prst="rect">
+            <a:avLst/>
+          </a:prstGeom>
+          <a:solidFill>
+            <a:srgbClr val="26231F"/>
+          </a:solidFill>
+          <a:ln>
+            <a:noFill/>
+          </a:ln>
+        </p:spPr>
+        <p:txBody>
+          <a:bodyPr rtlCol="0" anchor="ctr"/>
+          <a:lstStyle/>
+          <a:p>
+            <a:pPr algn="ctr"/>
+          </a:p>
+        </p:txBody>
+      </p:sp>
+      <p:sp>
+        <p:nvSpPr>
+          <p:cNvPr id="5" name="하단 라벨"/>
+          <p:cNvSpPr txBox="1"/>
+          <p:nvPr/>
+        </p:nvSpPr>
+        <p:spPr>
+          <a:xfrm>
+            <a:off x="640080" y="6437376"/>
+            <a:ext cx="5486400" cy="274320"/>
           </a:xfrm>
           <a:prstGeom prst="rect">
             <a:avLst/>
           </a:prstGeom>
           <a:noFill/>
-          <a:ln w="28575">
-            <a:solidFill>
-              <a:srgbClr val="995229"/>
-            </a:solidFill>
-          </a:ln>
-        </p:spPr>
-        <p:txBody>
-          <a:bodyPr rtlCol="0" anchor="ctr"/>
-          <a:lstStyle/>
-          <a:p>
-            <a:pPr algn="ctr"/>
-          </a:p>
-        </p:txBody>
-      </p:sp>
-      <p:sp>
-        <p:nvSpPr>
-          <p:cNvPr id="4" name="장식"/>
+        </p:spPr>
+        <p:txBody>
+          <a:bodyPr wrap="square" lIns="54864" rIns="54864" tIns="27432" bIns="27432" anchor="ctr">
+            <a:noAutofit/>
+          </a:bodyPr>
+          <a:lstStyle/>
+          <a:p>
+            <a:pPr algn="l">
+              <a:lnSpc>
+                <a:spcPct val="115000"/>
+              </a:lnSpc>
+            </a:pPr>
+            <a:r>
+              <a:rPr sz="900" b="1" i="0" spc="250">
+                <a:solidFill>
+                  <a:srgbClr val="26231F"/>
+                </a:solidFill>
+              </a:rPr>
+              <a:t>PRESENTATION</a:t>
+            </a:r>
+          </a:p>
+        </p:txBody>
+      </p:sp>
+      <p:sp>
+        <p:nvSpPr>
+          <p:cNvPr id="6" name="포인트"/>
           <p:cNvSpPr/>
           <p:nvPr/>
         </p:nvSpPr>
         <p:spPr>
-          <a:xfrm>
-            <a:off x="384048" y="384048"/>
-            <a:ext cx="11423599" cy="6089904"/>
-          </a:xfrm>
-          <a:prstGeom prst="rect">
+          <a:xfrm rot="18900000">
+            <a:off x="11213287" y="6473952"/>
+            <a:ext cx="219456" cy="219456"/>
+          </a:xfrm>
+          <a:prstGeom prst="teardrop">
             <a:avLst/>
           </a:prstGeom>
-          <a:noFill/>
-          <a:ln w="9525">
-            <a:solidFill>
-              <a:srgbClr val="F4DBCD"/>
-            </a:solidFill>
+          <a:solidFill>
+            <a:srgbClr val="D89C79"/>
+          </a:solidFill>
+          <a:ln>
+            <a:noFill/>
           </a:ln>
         </p:spPr>
         <p:txBody>
@@ -3542,8 +3689,8 @@
         </p:nvSpPr>
         <p:spPr>
           <a:xfrm>
-            <a:off x="822960" y="548640"/>
-            <a:ext cx="9265615" cy="822960"/>
+            <a:off x="640080" y="502920"/>
+            <a:ext cx="10911535" cy="914400"/>
           </a:xfrm>
         </p:spPr>
         <p:txBody>
@@ -3560,7 +3707,7 @@
             <a:r>
               <a:rPr sz="3000" b="1" i="0">
                 <a:solidFill>
-                  <a:srgbClr val="492713"/>
+                  <a:srgbClr val="26231F"/>
                 </a:solidFill>
               </a:rPr>
               <a:t>목차</a:t>
@@ -3570,26 +3717,26 @@
       </p:sp>
       <p:sp>
         <p:nvSpPr>
-          <p:cNvPr id="5" name="줄 1"/>
+          <p:cNvPr id="7" name="줄 1"/>
           <p:cNvSpPr/>
           <p:nvPr/>
         </p:nvSpPr>
         <p:spPr>
           <a:xfrm>
-            <a:off x="822960" y="1554480"/>
-            <a:ext cx="10545775" cy="914400"/>
+            <a:off x="640080" y="1600200"/>
+            <a:ext cx="10911535" cy="914400"/>
           </a:xfrm>
           <a:prstGeom prst="roundRect">
             <a:avLst>
-              <a:gd name="adj" fmla="val 8000"/>
+              <a:gd name="adj" fmla="val 7000"/>
             </a:avLst>
           </a:prstGeom>
           <a:solidFill>
-            <a:srgbClr val="FBF3EF"/>
+            <a:srgbClr val="FFFFFF"/>
           </a:solidFill>
           <a:ln w="12700">
             <a:solidFill>
-              <a:srgbClr val="F4DBCD"/>
+              <a:srgbClr val="EBC4AD"/>
             </a:solidFill>
           </a:ln>
         </p:spPr>
@@ -3603,20 +3750,22 @@
       </p:sp>
       <p:sp>
         <p:nvSpPr>
-          <p:cNvPr id="6" name="번호 1"/>
+          <p:cNvPr id="8" name="번호 1"/>
           <p:cNvSpPr/>
           <p:nvPr/>
         </p:nvSpPr>
         <p:spPr>
           <a:xfrm>
-            <a:off x="1005840" y="1783080"/>
+            <a:off x="822959" y="1828800"/>
             <a:ext cx="457200" cy="457200"/>
           </a:xfrm>
-          <a:prstGeom prst="ellipse">
-            <a:avLst/>
+          <a:prstGeom prst="roundRect">
+            <a:avLst>
+              <a:gd name="adj" fmla="val 25000"/>
+            </a:avLst>
           </a:prstGeom>
           <a:solidFill>
-            <a:srgbClr val="995229"/>
+            <a:srgbClr val="D89C79"/>
           </a:solidFill>
           <a:ln>
             <a:noFill/>
@@ -3636,7 +3785,7 @@
             <a:r>
               <a:rPr sz="1600" b="1" i="0">
                 <a:solidFill>
-                  <a:srgbClr val="FFFFFF"/>
+                  <a:srgbClr val="26231F"/>
                 </a:solidFill>
               </a:rPr>
               <a:t>1</a:t>
@@ -3646,13 +3795,13 @@
       </p:sp>
       <p:sp>
         <p:nvSpPr>
-          <p:cNvPr id="7" name="TextBox 6"/>
+          <p:cNvPr id="9" name="TextBox 8"/>
           <p:cNvSpPr txBox="1"/>
           <p:nvPr/>
         </p:nvSpPr>
         <p:spPr>
           <a:xfrm>
-            <a:off x="1691640" y="1600200"/>
+            <a:off x="1508760" y="1645920"/>
             <a:ext cx="2743200" cy="822960"/>
           </a:xfrm>
           <a:prstGeom prst="rect">
@@ -3674,7 +3823,7 @@
             <a:r>
               <a:rPr sz="1800" b="1" i="0">
                 <a:solidFill>
-                  <a:srgbClr val="492713"/>
+                  <a:srgbClr val="493427"/>
                 </a:solidFill>
               </a:rPr>
               <a:t>추진 경과</a:t>
@@ -3684,14 +3833,14 @@
       </p:sp>
       <p:sp>
         <p:nvSpPr>
-          <p:cNvPr id="8" name="TextBox 7"/>
+          <p:cNvPr id="10" name="TextBox 9"/>
           <p:cNvSpPr txBox="1"/>
           <p:nvPr/>
         </p:nvSpPr>
         <p:spPr>
           <a:xfrm>
-            <a:off x="4480560" y="1600200"/>
-            <a:ext cx="6705295" cy="822960"/>
+            <a:off x="4297680" y="1645920"/>
+            <a:ext cx="7071055" cy="822960"/>
           </a:xfrm>
           <a:prstGeom prst="rect">
             <a:avLst/>
@@ -3712,7 +3861,7 @@
             <a:r>
               <a:rPr sz="1500" b="0" i="0">
                 <a:solidFill>
-                  <a:srgbClr val="2B2B2B"/>
+                  <a:srgbClr val="26231F"/>
                 </a:solidFill>
               </a:rPr>
               <a:t>한 줄로 내용을 적어 주세요</a:t>
@@ -3722,26 +3871,26 @@
       </p:sp>
       <p:sp>
         <p:nvSpPr>
-          <p:cNvPr id="9" name="줄 2"/>
+          <p:cNvPr id="11" name="줄 2"/>
           <p:cNvSpPr/>
           <p:nvPr/>
         </p:nvSpPr>
         <p:spPr>
           <a:xfrm>
-            <a:off x="822960" y="2606039"/>
-            <a:ext cx="10545775" cy="914400"/>
+            <a:off x="640080" y="2651760"/>
+            <a:ext cx="10911535" cy="914400"/>
           </a:xfrm>
           <a:prstGeom prst="roundRect">
             <a:avLst>
-              <a:gd name="adj" fmla="val 8000"/>
+              <a:gd name="adj" fmla="val 7000"/>
             </a:avLst>
           </a:prstGeom>
           <a:solidFill>
-            <a:srgbClr val="FBF3EF"/>
+            <a:srgbClr val="FFFFFF"/>
           </a:solidFill>
           <a:ln w="12700">
             <a:solidFill>
-              <a:srgbClr val="F4DBCD"/>
+              <a:srgbClr val="EBC4AD"/>
             </a:solidFill>
           </a:ln>
         </p:spPr>
@@ -3755,20 +3904,22 @@
       </p:sp>
       <p:sp>
         <p:nvSpPr>
-          <p:cNvPr id="10" name="번호 2"/>
+          <p:cNvPr id="12" name="번호 2"/>
           <p:cNvSpPr/>
           <p:nvPr/>
         </p:nvSpPr>
         <p:spPr>
           <a:xfrm>
-            <a:off x="1005840" y="2834639"/>
+            <a:off x="822959" y="2880360"/>
             <a:ext cx="457200" cy="457200"/>
           </a:xfrm>
-          <a:prstGeom prst="ellipse">
-            <a:avLst/>
+          <a:prstGeom prst="roundRect">
+            <a:avLst>
+              <a:gd name="adj" fmla="val 25000"/>
+            </a:avLst>
           </a:prstGeom>
           <a:solidFill>
-            <a:srgbClr val="995229"/>
+            <a:srgbClr val="D89C79"/>
           </a:solidFill>
           <a:ln>
             <a:noFill/>
@@ -3788,7 +3939,7 @@
             <a:r>
               <a:rPr sz="1600" b="1" i="0">
                 <a:solidFill>
-                  <a:srgbClr val="FFFFFF"/>
+                  <a:srgbClr val="26231F"/>
                 </a:solidFill>
               </a:rPr>
               <a:t>2</a:t>
@@ -3798,13 +3949,13 @@
       </p:sp>
       <p:sp>
         <p:nvSpPr>
-          <p:cNvPr id="11" name="TextBox 10"/>
+          <p:cNvPr id="13" name="TextBox 12"/>
           <p:cNvSpPr txBox="1"/>
           <p:nvPr/>
         </p:nvSpPr>
         <p:spPr>
           <a:xfrm>
-            <a:off x="1691640" y="2651759"/>
+            <a:off x="1508760" y="2697479"/>
             <a:ext cx="2743200" cy="822960"/>
           </a:xfrm>
           <a:prstGeom prst="rect">
@@ -3826,7 +3977,7 @@
             <a:r>
               <a:rPr sz="1800" b="1" i="0">
                 <a:solidFill>
-                  <a:srgbClr val="492713"/>
+                  <a:srgbClr val="493427"/>
                 </a:solidFill>
               </a:rPr>
               <a:t>주요 성과</a:t>
@@ -3836,14 +3987,14 @@
       </p:sp>
       <p:sp>
         <p:nvSpPr>
-          <p:cNvPr id="12" name="TextBox 11"/>
+          <p:cNvPr id="14" name="TextBox 13"/>
           <p:cNvSpPr txBox="1"/>
           <p:nvPr/>
         </p:nvSpPr>
         <p:spPr>
           <a:xfrm>
-            <a:off x="4480560" y="2651759"/>
-            <a:ext cx="6705295" cy="822960"/>
+            <a:off x="4297680" y="2697479"/>
+            <a:ext cx="7071055" cy="822960"/>
           </a:xfrm>
           <a:prstGeom prst="rect">
             <a:avLst/>
@@ -3864,7 +4015,7 @@
             <a:r>
               <a:rPr sz="1500" b="0" i="0">
                 <a:solidFill>
-                  <a:srgbClr val="2B2B2B"/>
+                  <a:srgbClr val="26231F"/>
                 </a:solidFill>
               </a:rPr>
               <a:t>한 줄로 내용을 적어 주세요</a:t>
@@ -3874,26 +4025,26 @@
       </p:sp>
       <p:sp>
         <p:nvSpPr>
-          <p:cNvPr id="13" name="줄 3"/>
+          <p:cNvPr id="15" name="줄 3"/>
           <p:cNvSpPr/>
           <p:nvPr/>
         </p:nvSpPr>
         <p:spPr>
           <a:xfrm>
-            <a:off x="822960" y="3657600"/>
-            <a:ext cx="10545775" cy="914400"/>
+            <a:off x="640080" y="3703320"/>
+            <a:ext cx="10911535" cy="914400"/>
           </a:xfrm>
           <a:prstGeom prst="roundRect">
             <a:avLst>
-              <a:gd name="adj" fmla="val 8000"/>
+              <a:gd name="adj" fmla="val 7000"/>
             </a:avLst>
           </a:prstGeom>
           <a:solidFill>
-            <a:srgbClr val="FBF3EF"/>
+            <a:srgbClr val="FFFFFF"/>
           </a:solidFill>
           <a:ln w="12700">
             <a:solidFill>
-              <a:srgbClr val="F4DBCD"/>
+              <a:srgbClr val="EBC4AD"/>
             </a:solidFill>
           </a:ln>
         </p:spPr>
@@ -3907,20 +4058,22 @@
       </p:sp>
       <p:sp>
         <p:nvSpPr>
-          <p:cNvPr id="14" name="번호 3"/>
+          <p:cNvPr id="16" name="번호 3"/>
           <p:cNvSpPr/>
           <p:nvPr/>
         </p:nvSpPr>
         <p:spPr>
           <a:xfrm>
-            <a:off x="1005840" y="3886200"/>
+            <a:off x="822959" y="3931920"/>
             <a:ext cx="457200" cy="457200"/>
           </a:xfrm>
-          <a:prstGeom prst="ellipse">
-            <a:avLst/>
+          <a:prstGeom prst="roundRect">
+            <a:avLst>
+              <a:gd name="adj" fmla="val 25000"/>
+            </a:avLst>
           </a:prstGeom>
           <a:solidFill>
-            <a:srgbClr val="995229"/>
+            <a:srgbClr val="D89C79"/>
           </a:solidFill>
           <a:ln>
             <a:noFill/>
@@ -3940,7 +4093,7 @@
             <a:r>
               <a:rPr sz="1600" b="1" i="0">
                 <a:solidFill>
-                  <a:srgbClr val="FFFFFF"/>
+                  <a:srgbClr val="26231F"/>
                 </a:solidFill>
               </a:rPr>
               <a:t>3</a:t>
@@ -3950,13 +4103,13 @@
       </p:sp>
       <p:sp>
         <p:nvSpPr>
-          <p:cNvPr id="15" name="TextBox 14"/>
+          <p:cNvPr id="17" name="TextBox 16"/>
           <p:cNvSpPr txBox="1"/>
           <p:nvPr/>
         </p:nvSpPr>
         <p:spPr>
           <a:xfrm>
-            <a:off x="1691640" y="3703320"/>
+            <a:off x="1508760" y="3749039"/>
             <a:ext cx="2743200" cy="822960"/>
           </a:xfrm>
           <a:prstGeom prst="rect">
@@ -3978,7 +4131,7 @@
             <a:r>
               <a:rPr sz="1800" b="1" i="0">
                 <a:solidFill>
-                  <a:srgbClr val="492713"/>
+                  <a:srgbClr val="493427"/>
                 </a:solidFill>
               </a:rPr>
               <a:t>이슈와 대응</a:t>
@@ -3988,14 +4141,14 @@
       </p:sp>
       <p:sp>
         <p:nvSpPr>
-          <p:cNvPr id="16" name="TextBox 15"/>
+          <p:cNvPr id="18" name="TextBox 17"/>
           <p:cNvSpPr txBox="1"/>
           <p:nvPr/>
         </p:nvSpPr>
         <p:spPr>
           <a:xfrm>
-            <a:off x="4480560" y="3703320"/>
-            <a:ext cx="6705295" cy="822960"/>
+            <a:off x="4297680" y="3749039"/>
+            <a:ext cx="7071055" cy="822960"/>
           </a:xfrm>
           <a:prstGeom prst="rect">
             <a:avLst/>
@@ -4016,7 +4169,7 @@
             <a:r>
               <a:rPr sz="1500" b="0" i="0">
                 <a:solidFill>
-                  <a:srgbClr val="2B2B2B"/>
+                  <a:srgbClr val="26231F"/>
                 </a:solidFill>
               </a:rPr>
               <a:t>한 줄로 내용을 적어 주세요</a:t>
@@ -4026,26 +4179,26 @@
       </p:sp>
       <p:sp>
         <p:nvSpPr>
-          <p:cNvPr id="17" name="줄 4"/>
+          <p:cNvPr id="19" name="줄 4"/>
           <p:cNvSpPr/>
           <p:nvPr/>
         </p:nvSpPr>
         <p:spPr>
           <a:xfrm>
-            <a:off x="822960" y="4709159"/>
-            <a:ext cx="10545775" cy="914400"/>
+            <a:off x="640080" y="4754879"/>
+            <a:ext cx="10911535" cy="914400"/>
           </a:xfrm>
           <a:prstGeom prst="roundRect">
             <a:avLst>
-              <a:gd name="adj" fmla="val 8000"/>
+              <a:gd name="adj" fmla="val 7000"/>
             </a:avLst>
           </a:prstGeom>
           <a:solidFill>
-            <a:srgbClr val="FBF3EF"/>
+            <a:srgbClr val="FFFFFF"/>
           </a:solidFill>
           <a:ln w="12700">
             <a:solidFill>
-              <a:srgbClr val="F4DBCD"/>
+              <a:srgbClr val="EBC4AD"/>
             </a:solidFill>
           </a:ln>
         </p:spPr>
@@ -4059,20 +4212,22 @@
       </p:sp>
       <p:sp>
         <p:nvSpPr>
-          <p:cNvPr id="18" name="번호 4"/>
+          <p:cNvPr id="20" name="번호 4"/>
           <p:cNvSpPr/>
           <p:nvPr/>
         </p:nvSpPr>
         <p:spPr>
           <a:xfrm>
-            <a:off x="1005840" y="4937759"/>
+            <a:off x="822959" y="4983479"/>
             <a:ext cx="457200" cy="457200"/>
           </a:xfrm>
-          <a:prstGeom prst="ellipse">
-            <a:avLst/>
+          <a:prstGeom prst="roundRect">
+            <a:avLst>
+              <a:gd name="adj" fmla="val 25000"/>
+            </a:avLst>
           </a:prstGeom>
           <a:solidFill>
-            <a:srgbClr val="995229"/>
+            <a:srgbClr val="D89C79"/>
           </a:solidFill>
           <a:ln>
             <a:noFill/>
@@ -4092,7 +4247,7 @@
             <a:r>
               <a:rPr sz="1600" b="1" i="0">
                 <a:solidFill>
-                  <a:srgbClr val="FFFFFF"/>
+                  <a:srgbClr val="26231F"/>
                 </a:solidFill>
               </a:rPr>
               <a:t>4</a:t>
@@ -4102,13 +4257,13 @@
       </p:sp>
       <p:sp>
         <p:nvSpPr>
-          <p:cNvPr id="19" name="TextBox 18"/>
+          <p:cNvPr id="21" name="TextBox 20"/>
           <p:cNvSpPr txBox="1"/>
           <p:nvPr/>
         </p:nvSpPr>
         <p:spPr>
           <a:xfrm>
-            <a:off x="1691640" y="4754879"/>
+            <a:off x="1508760" y="4800599"/>
             <a:ext cx="2743200" cy="822960"/>
           </a:xfrm>
           <a:prstGeom prst="rect">
@@ -4130,7 +4285,7 @@
             <a:r>
               <a:rPr sz="1800" b="1" i="0">
                 <a:solidFill>
-                  <a:srgbClr val="492713"/>
+                  <a:srgbClr val="493427"/>
                 </a:solidFill>
               </a:rPr>
               <a:t>향후 계획</a:t>
@@ -4140,14 +4295,14 @@
       </p:sp>
       <p:sp>
         <p:nvSpPr>
-          <p:cNvPr id="20" name="TextBox 19"/>
+          <p:cNvPr id="22" name="TextBox 21"/>
           <p:cNvSpPr txBox="1"/>
           <p:nvPr/>
         </p:nvSpPr>
         <p:spPr>
           <a:xfrm>
-            <a:off x="4480560" y="4754879"/>
-            <a:ext cx="6705295" cy="822960"/>
+            <a:off x="4297680" y="4800599"/>
+            <a:ext cx="7071055" cy="822960"/>
           </a:xfrm>
           <a:prstGeom prst="rect">
             <a:avLst/>
@@ -4168,7 +4323,7 @@
             <a:r>
               <a:rPr sz="1500" b="0" i="0">
                 <a:solidFill>
-                  <a:srgbClr val="2B2B2B"/>
+                  <a:srgbClr val="26231F"/>
                 </a:solidFill>
               </a:rPr>
               <a:t>한 줄로 내용을 적어 주세요</a:t>
@@ -4190,7 +4345,7 @@
     <p:bg>
       <p:bgPr>
         <a:solidFill>
-          <a:srgbClr val="FBF3EF"/>
+          <a:srgbClr val="FFFFFF"/>
         </a:solidFill>
         <a:effectLst/>
       </p:bgPr>
@@ -4210,46 +4365,113 @@
         </p:nvSpPr>
         <p:spPr>
           <a:xfrm>
-            <a:off x="256032" y="256032"/>
-            <a:ext cx="11679631" cy="6345936"/>
+            <a:off x="0" y="6565392"/>
+            <a:ext cx="12191695" cy="292608"/>
+          </a:xfrm>
+          <a:prstGeom prst="rect">
+            <a:avLst/>
+          </a:prstGeom>
+          <a:solidFill>
+            <a:srgbClr val="EBC4AD"/>
+          </a:solidFill>
+          <a:ln>
+            <a:noFill/>
+          </a:ln>
+        </p:spPr>
+        <p:txBody>
+          <a:bodyPr rtlCol="0" anchor="ctr"/>
+          <a:lstStyle/>
+          <a:p>
+            <a:pPr algn="ctr"/>
+          </a:p>
+        </p:txBody>
+      </p:sp>
+      <p:sp>
+        <p:nvSpPr>
+          <p:cNvPr id="4" name="장식"/>
+          <p:cNvSpPr/>
+          <p:nvPr/>
+        </p:nvSpPr>
+        <p:spPr>
+          <a:xfrm>
+            <a:off x="640080" y="6400800"/>
+            <a:ext cx="10911535" cy="10972"/>
+          </a:xfrm>
+          <a:prstGeom prst="rect">
+            <a:avLst/>
+          </a:prstGeom>
+          <a:solidFill>
+            <a:srgbClr val="26231F"/>
+          </a:solidFill>
+          <a:ln>
+            <a:noFill/>
+          </a:ln>
+        </p:spPr>
+        <p:txBody>
+          <a:bodyPr rtlCol="0" anchor="ctr"/>
+          <a:lstStyle/>
+          <a:p>
+            <a:pPr algn="ctr"/>
+          </a:p>
+        </p:txBody>
+      </p:sp>
+      <p:sp>
+        <p:nvSpPr>
+          <p:cNvPr id="5" name="하단 라벨"/>
+          <p:cNvSpPr txBox="1"/>
+          <p:nvPr/>
+        </p:nvSpPr>
+        <p:spPr>
+          <a:xfrm>
+            <a:off x="640080" y="6437376"/>
+            <a:ext cx="5486400" cy="274320"/>
           </a:xfrm>
           <a:prstGeom prst="rect">
             <a:avLst/>
           </a:prstGeom>
           <a:noFill/>
-          <a:ln w="28575">
-            <a:solidFill>
-              <a:srgbClr val="995229"/>
-            </a:solidFill>
-          </a:ln>
-        </p:spPr>
-        <p:txBody>
-          <a:bodyPr rtlCol="0" anchor="ctr"/>
-          <a:lstStyle/>
-          <a:p>
-            <a:pPr algn="ctr"/>
-          </a:p>
-        </p:txBody>
-      </p:sp>
-      <p:sp>
-        <p:nvSpPr>
-          <p:cNvPr id="4" name="장식"/>
+        </p:spPr>
+        <p:txBody>
+          <a:bodyPr wrap="square" lIns="54864" rIns="54864" tIns="27432" bIns="27432" anchor="ctr">
+            <a:noAutofit/>
+          </a:bodyPr>
+          <a:lstStyle/>
+          <a:p>
+            <a:pPr algn="l">
+              <a:lnSpc>
+                <a:spcPct val="115000"/>
+              </a:lnSpc>
+            </a:pPr>
+            <a:r>
+              <a:rPr sz="900" b="1" i="0" spc="250">
+                <a:solidFill>
+                  <a:srgbClr val="26231F"/>
+                </a:solidFill>
+              </a:rPr>
+              <a:t>PRESENTATION</a:t>
+            </a:r>
+          </a:p>
+        </p:txBody>
+      </p:sp>
+      <p:sp>
+        <p:nvSpPr>
+          <p:cNvPr id="6" name="포인트"/>
           <p:cNvSpPr/>
           <p:nvPr/>
         </p:nvSpPr>
         <p:spPr>
-          <a:xfrm>
-            <a:off x="384048" y="384048"/>
-            <a:ext cx="11423599" cy="6089904"/>
-          </a:xfrm>
-          <a:prstGeom prst="rect">
+          <a:xfrm rot="18900000">
+            <a:off x="11213287" y="6473952"/>
+            <a:ext cx="219456" cy="219456"/>
+          </a:xfrm>
+          <a:prstGeom prst="teardrop">
             <a:avLst/>
           </a:prstGeom>
-          <a:noFill/>
-          <a:ln w="9525">
-            <a:solidFill>
-              <a:srgbClr val="F4DBCD"/>
-            </a:solidFill>
+          <a:solidFill>
+            <a:srgbClr val="D89C79"/>
+          </a:solidFill>
+          <a:ln>
+            <a:noFill/>
           </a:ln>
         </p:spPr>
         <p:txBody>
@@ -4272,8 +4494,8 @@
         </p:nvSpPr>
         <p:spPr>
           <a:xfrm>
-            <a:off x="822960" y="548640"/>
-            <a:ext cx="9265615" cy="822960"/>
+            <a:off x="640080" y="502920"/>
+            <a:ext cx="10911535" cy="914400"/>
           </a:xfrm>
         </p:spPr>
         <p:txBody>
@@ -4290,7 +4512,7 @@
             <a:r>
               <a:rPr sz="3000" b="1" i="0">
                 <a:solidFill>
-                  <a:srgbClr val="492713"/>
+                  <a:srgbClr val="26231F"/>
                 </a:solidFill>
               </a:rPr>
               <a:t>핵심 메시지</a:t>
@@ -4300,14 +4522,14 @@
       </p:sp>
       <p:sp>
         <p:nvSpPr>
-          <p:cNvPr id="5" name="핵심 문장"/>
+          <p:cNvPr id="7" name="핵심 문장"/>
           <p:cNvSpPr txBox="1"/>
           <p:nvPr/>
         </p:nvSpPr>
         <p:spPr>
           <a:xfrm>
-            <a:off x="822960" y="1554480"/>
-            <a:ext cx="10545775" cy="1188720"/>
+            <a:off x="640080" y="1600200"/>
+            <a:ext cx="10911535" cy="1188720"/>
           </a:xfrm>
           <a:prstGeom prst="rect">
             <a:avLst/>
@@ -4328,7 +4550,7 @@
             <a:r>
               <a:rPr sz="2600" b="1" i="0">
                 <a:solidFill>
-                  <a:srgbClr val="492713"/>
+                  <a:srgbClr val="493427"/>
                 </a:solidFill>
               </a:rPr>
               <a:t>한 문장으로 말하면 — 여기에 핵심 메시지를 입력하세요</a:t>
@@ -4338,26 +4560,26 @@
       </p:sp>
       <p:sp>
         <p:nvSpPr>
-          <p:cNvPr id="6" name="카드 1"/>
+          <p:cNvPr id="8" name="카드 1"/>
           <p:cNvSpPr/>
           <p:nvPr/>
         </p:nvSpPr>
         <p:spPr>
           <a:xfrm>
-            <a:off x="822960" y="3017520"/>
-            <a:ext cx="3362858" cy="3017520"/>
+            <a:off x="640080" y="3063240"/>
+            <a:ext cx="3484778" cy="3017520"/>
           </a:xfrm>
           <a:prstGeom prst="roundRect">
             <a:avLst>
-              <a:gd name="adj" fmla="val 8000"/>
+              <a:gd name="adj" fmla="val 7000"/>
             </a:avLst>
           </a:prstGeom>
           <a:solidFill>
-            <a:srgbClr val="FBF3EF"/>
+            <a:srgbClr val="FFFFFF"/>
           </a:solidFill>
-          <a:ln w="15875">
+          <a:ln w="12700">
             <a:solidFill>
-              <a:srgbClr val="F4DBCD"/>
+              <a:srgbClr val="EBC4AD"/>
             </a:solidFill>
           </a:ln>
         </p:spPr>
@@ -4371,20 +4593,22 @@
       </p:sp>
       <p:sp>
         <p:nvSpPr>
-          <p:cNvPr id="7" name="번호 1"/>
+          <p:cNvPr id="9" name="번호 1"/>
           <p:cNvSpPr/>
           <p:nvPr/>
         </p:nvSpPr>
         <p:spPr>
           <a:xfrm>
-            <a:off x="1005840" y="3200400"/>
+            <a:off x="822959" y="3246120"/>
             <a:ext cx="457200" cy="457200"/>
           </a:xfrm>
-          <a:prstGeom prst="ellipse">
-            <a:avLst/>
+          <a:prstGeom prst="roundRect">
+            <a:avLst>
+              <a:gd name="adj" fmla="val 25000"/>
+            </a:avLst>
           </a:prstGeom>
           <a:solidFill>
-            <a:srgbClr val="995229"/>
+            <a:srgbClr val="D89C79"/>
           </a:solidFill>
           <a:ln>
             <a:noFill/>
@@ -4404,7 +4628,7 @@
             <a:r>
               <a:rPr sz="1600" b="1" i="0">
                 <a:solidFill>
-                  <a:srgbClr val="FFFFFF"/>
+                  <a:srgbClr val="26231F"/>
                 </a:solidFill>
               </a:rPr>
               <a:t>1</a:t>
@@ -4414,14 +4638,14 @@
       </p:sp>
       <p:sp>
         <p:nvSpPr>
-          <p:cNvPr id="8" name="TextBox 7"/>
+          <p:cNvPr id="10" name="TextBox 9"/>
           <p:cNvSpPr txBox="1"/>
           <p:nvPr/>
         </p:nvSpPr>
         <p:spPr>
           <a:xfrm>
-            <a:off x="960120" y="3794760"/>
-            <a:ext cx="3088538" cy="640080"/>
+            <a:off x="777240" y="3840480"/>
+            <a:ext cx="3210458" cy="640080"/>
           </a:xfrm>
           <a:prstGeom prst="rect">
             <a:avLst/>
@@ -4442,7 +4666,7 @@
             <a:r>
               <a:rPr sz="1800" b="1" i="0">
                 <a:solidFill>
-                  <a:srgbClr val="492713"/>
+                  <a:srgbClr val="493427"/>
                 </a:solidFill>
               </a:rPr>
               <a:t>진행</a:t>
@@ -4452,14 +4676,14 @@
       </p:sp>
       <p:sp>
         <p:nvSpPr>
-          <p:cNvPr id="9" name="TextBox 8"/>
+          <p:cNvPr id="11" name="TextBox 10"/>
           <p:cNvSpPr txBox="1"/>
           <p:nvPr/>
         </p:nvSpPr>
         <p:spPr>
           <a:xfrm>
-            <a:off x="960120" y="4480560"/>
-            <a:ext cx="3088538" cy="1417319"/>
+            <a:off x="777240" y="4526280"/>
+            <a:ext cx="3210458" cy="1417319"/>
           </a:xfrm>
           <a:prstGeom prst="rect">
             <a:avLst/>
@@ -4480,7 +4704,7 @@
             <a:r>
               <a:rPr sz="1600" b="0" i="0">
                 <a:solidFill>
-                  <a:srgbClr val="2B2B2B"/>
+                  <a:srgbClr val="26231F"/>
                 </a:solidFill>
               </a:rPr>
               <a:t>내용을 입력하세요</a:t>
@@ -4495,7 +4719,7 @@
             <a:r>
               <a:rPr sz="1600" b="0" i="0">
                 <a:solidFill>
-                  <a:srgbClr val="2B2B2B"/>
+                  <a:srgbClr val="26231F"/>
                 </a:solidFill>
               </a:rPr>
               <a:t>내용을 입력하세요</a:t>
@@ -4505,26 +4729,26 @@
       </p:sp>
       <p:sp>
         <p:nvSpPr>
-          <p:cNvPr id="10" name="카드 2"/>
+          <p:cNvPr id="12" name="카드 2"/>
           <p:cNvSpPr/>
           <p:nvPr/>
         </p:nvSpPr>
         <p:spPr>
           <a:xfrm>
-            <a:off x="4414418" y="3017520"/>
-            <a:ext cx="3362858" cy="3017520"/>
+            <a:off x="4353458" y="3063240"/>
+            <a:ext cx="3484778" cy="3017520"/>
           </a:xfrm>
           <a:prstGeom prst="roundRect">
             <a:avLst>
-              <a:gd name="adj" fmla="val 8000"/>
+              <a:gd name="adj" fmla="val 7000"/>
             </a:avLst>
           </a:prstGeom>
           <a:solidFill>
-            <a:srgbClr val="FBF3EF"/>
+            <a:srgbClr val="FFFFFF"/>
           </a:solidFill>
-          <a:ln w="15875">
+          <a:ln w="12700">
             <a:solidFill>
-              <a:srgbClr val="F4DBCD"/>
+              <a:srgbClr val="EBC4AD"/>
             </a:solidFill>
           </a:ln>
         </p:spPr>
@@ -4538,20 +4762,22 @@
       </p:sp>
       <p:sp>
         <p:nvSpPr>
-          <p:cNvPr id="11" name="번호 2"/>
+          <p:cNvPr id="13" name="번호 2"/>
           <p:cNvSpPr/>
           <p:nvPr/>
         </p:nvSpPr>
         <p:spPr>
           <a:xfrm>
-            <a:off x="4597298" y="3200400"/>
+            <a:off x="4536338" y="3246120"/>
             <a:ext cx="457200" cy="457200"/>
           </a:xfrm>
-          <a:prstGeom prst="ellipse">
-            <a:avLst/>
+          <a:prstGeom prst="roundRect">
+            <a:avLst>
+              <a:gd name="adj" fmla="val 25000"/>
+            </a:avLst>
           </a:prstGeom>
           <a:solidFill>
-            <a:srgbClr val="995229"/>
+            <a:srgbClr val="D89C79"/>
           </a:solidFill>
           <a:ln>
             <a:noFill/>
@@ -4571,7 +4797,7 @@
             <a:r>
               <a:rPr sz="1600" b="1" i="0">
                 <a:solidFill>
-                  <a:srgbClr val="FFFFFF"/>
+                  <a:srgbClr val="26231F"/>
                 </a:solidFill>
               </a:rPr>
               <a:t>2</a:t>
@@ -4581,14 +4807,14 @@
       </p:sp>
       <p:sp>
         <p:nvSpPr>
-          <p:cNvPr id="12" name="TextBox 11"/>
+          <p:cNvPr id="14" name="TextBox 13"/>
           <p:cNvSpPr txBox="1"/>
           <p:nvPr/>
         </p:nvSpPr>
         <p:spPr>
           <a:xfrm>
-            <a:off x="4551578" y="3794760"/>
-            <a:ext cx="3088538" cy="640080"/>
+            <a:off x="4490618" y="3840480"/>
+            <a:ext cx="3210458" cy="640080"/>
           </a:xfrm>
           <a:prstGeom prst="rect">
             <a:avLst/>
@@ -4609,7 +4835,7 @@
             <a:r>
               <a:rPr sz="1800" b="1" i="0">
                 <a:solidFill>
-                  <a:srgbClr val="492713"/>
+                  <a:srgbClr val="493427"/>
                 </a:solidFill>
               </a:rPr>
               <a:t>성과</a:t>
@@ -4619,14 +4845,14 @@
       </p:sp>
       <p:sp>
         <p:nvSpPr>
-          <p:cNvPr id="13" name="TextBox 12"/>
+          <p:cNvPr id="15" name="TextBox 14"/>
           <p:cNvSpPr txBox="1"/>
           <p:nvPr/>
         </p:nvSpPr>
         <p:spPr>
           <a:xfrm>
-            <a:off x="4551578" y="4480560"/>
-            <a:ext cx="3088538" cy="1417319"/>
+            <a:off x="4490618" y="4526280"/>
+            <a:ext cx="3210458" cy="1417319"/>
           </a:xfrm>
           <a:prstGeom prst="rect">
             <a:avLst/>
@@ -4647,7 +4873,7 @@
             <a:r>
               <a:rPr sz="1600" b="0" i="0">
                 <a:solidFill>
-                  <a:srgbClr val="2B2B2B"/>
+                  <a:srgbClr val="26231F"/>
                 </a:solidFill>
               </a:rPr>
               <a:t>내용을 입력하세요</a:t>
@@ -4662,7 +4888,7 @@
             <a:r>
               <a:rPr sz="1600" b="0" i="0">
                 <a:solidFill>
-                  <a:srgbClr val="2B2B2B"/>
+                  <a:srgbClr val="26231F"/>
                 </a:solidFill>
               </a:rPr>
               <a:t>내용을 입력하세요</a:t>
@@ -4672,26 +4898,26 @@
       </p:sp>
       <p:sp>
         <p:nvSpPr>
-          <p:cNvPr id="14" name="카드 3"/>
+          <p:cNvPr id="16" name="카드 3"/>
           <p:cNvSpPr/>
           <p:nvPr/>
         </p:nvSpPr>
         <p:spPr>
           <a:xfrm>
-            <a:off x="8005876" y="3017520"/>
-            <a:ext cx="3362858" cy="3017520"/>
+            <a:off x="8066836" y="3063240"/>
+            <a:ext cx="3484778" cy="3017520"/>
           </a:xfrm>
           <a:prstGeom prst="roundRect">
             <a:avLst>
-              <a:gd name="adj" fmla="val 8000"/>
+              <a:gd name="adj" fmla="val 7000"/>
             </a:avLst>
           </a:prstGeom>
           <a:solidFill>
-            <a:srgbClr val="FBF3EF"/>
+            <a:srgbClr val="FFFFFF"/>
           </a:solidFill>
-          <a:ln w="15875">
+          <a:ln w="12700">
             <a:solidFill>
-              <a:srgbClr val="F4DBCD"/>
+              <a:srgbClr val="EBC4AD"/>
             </a:solidFill>
           </a:ln>
         </p:spPr>
@@ -4705,20 +4931,22 @@
       </p:sp>
       <p:sp>
         <p:nvSpPr>
-          <p:cNvPr id="15" name="번호 3"/>
+          <p:cNvPr id="17" name="번호 3"/>
           <p:cNvSpPr/>
           <p:nvPr/>
         </p:nvSpPr>
         <p:spPr>
           <a:xfrm>
-            <a:off x="8188756" y="3200400"/>
+            <a:off x="8249716" y="3246120"/>
             <a:ext cx="457200" cy="457200"/>
           </a:xfrm>
-          <a:prstGeom prst="ellipse">
-            <a:avLst/>
+          <a:prstGeom prst="roundRect">
+            <a:avLst>
+              <a:gd name="adj" fmla="val 25000"/>
+            </a:avLst>
           </a:prstGeom>
           <a:solidFill>
-            <a:srgbClr val="995229"/>
+            <a:srgbClr val="D89C79"/>
           </a:solidFill>
           <a:ln>
             <a:noFill/>
@@ -4738,7 +4966,7 @@
             <a:r>
               <a:rPr sz="1600" b="1" i="0">
                 <a:solidFill>
-                  <a:srgbClr val="FFFFFF"/>
+                  <a:srgbClr val="26231F"/>
                 </a:solidFill>
               </a:rPr>
               <a:t>3</a:t>
@@ -4748,14 +4976,14 @@
       </p:sp>
       <p:sp>
         <p:nvSpPr>
-          <p:cNvPr id="16" name="TextBox 15"/>
+          <p:cNvPr id="18" name="TextBox 17"/>
           <p:cNvSpPr txBox="1"/>
           <p:nvPr/>
         </p:nvSpPr>
         <p:spPr>
           <a:xfrm>
-            <a:off x="8143036" y="3794760"/>
-            <a:ext cx="3088538" cy="640080"/>
+            <a:off x="8203996" y="3840480"/>
+            <a:ext cx="3210458" cy="640080"/>
           </a:xfrm>
           <a:prstGeom prst="rect">
             <a:avLst/>
@@ -4776,7 +5004,7 @@
             <a:r>
               <a:rPr sz="1800" b="1" i="0">
                 <a:solidFill>
-                  <a:srgbClr val="492713"/>
+                  <a:srgbClr val="493427"/>
                 </a:solidFill>
               </a:rPr>
               <a:t>이슈</a:t>
@@ -4786,14 +5014,14 @@
       </p:sp>
       <p:sp>
         <p:nvSpPr>
-          <p:cNvPr id="17" name="TextBox 16"/>
+          <p:cNvPr id="19" name="TextBox 18"/>
           <p:cNvSpPr txBox="1"/>
           <p:nvPr/>
         </p:nvSpPr>
         <p:spPr>
           <a:xfrm>
-            <a:off x="8143036" y="4480560"/>
-            <a:ext cx="3088538" cy="1417319"/>
+            <a:off x="8203996" y="4526280"/>
+            <a:ext cx="3210458" cy="1417319"/>
           </a:xfrm>
           <a:prstGeom prst="rect">
             <a:avLst/>
@@ -4814,7 +5042,7 @@
             <a:r>
               <a:rPr sz="1600" b="0" i="0">
                 <a:solidFill>
-                  <a:srgbClr val="2B2B2B"/>
+                  <a:srgbClr val="26231F"/>
                 </a:solidFill>
               </a:rPr>
               <a:t>내용을 입력하세요</a:t>
@@ -4829,7 +5057,7 @@
             <a:r>
               <a:rPr sz="1600" b="0" i="0">
                 <a:solidFill>
-                  <a:srgbClr val="2B2B2B"/>
+                  <a:srgbClr val="26231F"/>
                 </a:solidFill>
               </a:rPr>
               <a:t>내용을 입력하세요</a:t>
@@ -4851,7 +5079,7 @@
     <p:bg>
       <p:bgPr>
         <a:solidFill>
-          <a:srgbClr val="FBF3EF"/>
+          <a:srgbClr val="FFFFFF"/>
         </a:solidFill>
         <a:effectLst/>
       </p:bgPr>
@@ -4871,46 +5099,113 @@
         </p:nvSpPr>
         <p:spPr>
           <a:xfrm>
-            <a:off x="256032" y="256032"/>
-            <a:ext cx="11679631" cy="6345936"/>
+            <a:off x="0" y="6565392"/>
+            <a:ext cx="12191695" cy="292608"/>
+          </a:xfrm>
+          <a:prstGeom prst="rect">
+            <a:avLst/>
+          </a:prstGeom>
+          <a:solidFill>
+            <a:srgbClr val="EBC4AD"/>
+          </a:solidFill>
+          <a:ln>
+            <a:noFill/>
+          </a:ln>
+        </p:spPr>
+        <p:txBody>
+          <a:bodyPr rtlCol="0" anchor="ctr"/>
+          <a:lstStyle/>
+          <a:p>
+            <a:pPr algn="ctr"/>
+          </a:p>
+        </p:txBody>
+      </p:sp>
+      <p:sp>
+        <p:nvSpPr>
+          <p:cNvPr id="4" name="장식"/>
+          <p:cNvSpPr/>
+          <p:nvPr/>
+        </p:nvSpPr>
+        <p:spPr>
+          <a:xfrm>
+            <a:off x="640080" y="6400800"/>
+            <a:ext cx="10911535" cy="10972"/>
+          </a:xfrm>
+          <a:prstGeom prst="rect">
+            <a:avLst/>
+          </a:prstGeom>
+          <a:solidFill>
+            <a:srgbClr val="26231F"/>
+          </a:solidFill>
+          <a:ln>
+            <a:noFill/>
+          </a:ln>
+        </p:spPr>
+        <p:txBody>
+          <a:bodyPr rtlCol="0" anchor="ctr"/>
+          <a:lstStyle/>
+          <a:p>
+            <a:pPr algn="ctr"/>
+          </a:p>
+        </p:txBody>
+      </p:sp>
+      <p:sp>
+        <p:nvSpPr>
+          <p:cNvPr id="5" name="하단 라벨"/>
+          <p:cNvSpPr txBox="1"/>
+          <p:nvPr/>
+        </p:nvSpPr>
+        <p:spPr>
+          <a:xfrm>
+            <a:off x="640080" y="6437376"/>
+            <a:ext cx="5486400" cy="274320"/>
           </a:xfrm>
           <a:prstGeom prst="rect">
             <a:avLst/>
           </a:prstGeom>
           <a:noFill/>
-          <a:ln w="28575">
-            <a:solidFill>
-              <a:srgbClr val="995229"/>
-            </a:solidFill>
-          </a:ln>
-        </p:spPr>
-        <p:txBody>
-          <a:bodyPr rtlCol="0" anchor="ctr"/>
-          <a:lstStyle/>
-          <a:p>
-            <a:pPr algn="ctr"/>
-          </a:p>
-        </p:txBody>
-      </p:sp>
-      <p:sp>
-        <p:nvSpPr>
-          <p:cNvPr id="4" name="장식"/>
+        </p:spPr>
+        <p:txBody>
+          <a:bodyPr wrap="square" lIns="54864" rIns="54864" tIns="27432" bIns="27432" anchor="ctr">
+            <a:noAutofit/>
+          </a:bodyPr>
+          <a:lstStyle/>
+          <a:p>
+            <a:pPr algn="l">
+              <a:lnSpc>
+                <a:spcPct val="115000"/>
+              </a:lnSpc>
+            </a:pPr>
+            <a:r>
+              <a:rPr sz="900" b="1" i="0" spc="250">
+                <a:solidFill>
+                  <a:srgbClr val="26231F"/>
+                </a:solidFill>
+              </a:rPr>
+              <a:t>PRESENTATION</a:t>
+            </a:r>
+          </a:p>
+        </p:txBody>
+      </p:sp>
+      <p:sp>
+        <p:nvSpPr>
+          <p:cNvPr id="6" name="포인트"/>
           <p:cNvSpPr/>
           <p:nvPr/>
         </p:nvSpPr>
         <p:spPr>
-          <a:xfrm>
-            <a:off x="384048" y="384048"/>
-            <a:ext cx="11423599" cy="6089904"/>
-          </a:xfrm>
-          <a:prstGeom prst="rect">
+          <a:xfrm rot="18900000">
+            <a:off x="11213287" y="6473952"/>
+            <a:ext cx="219456" cy="219456"/>
+          </a:xfrm>
+          <a:prstGeom prst="teardrop">
             <a:avLst/>
           </a:prstGeom>
-          <a:noFill/>
-          <a:ln w="9525">
-            <a:solidFill>
-              <a:srgbClr val="F4DBCD"/>
-            </a:solidFill>
+          <a:solidFill>
+            <a:srgbClr val="D89C79"/>
+          </a:solidFill>
+          <a:ln>
+            <a:noFill/>
           </a:ln>
         </p:spPr>
         <p:txBody>
@@ -4933,8 +5228,8 @@
         </p:nvSpPr>
         <p:spPr>
           <a:xfrm>
-            <a:off x="822960" y="548640"/>
-            <a:ext cx="9265615" cy="822960"/>
+            <a:off x="640080" y="502920"/>
+            <a:ext cx="10911535" cy="914400"/>
           </a:xfrm>
         </p:spPr>
         <p:txBody>
@@ -4951,7 +5246,7 @@
             <a:r>
               <a:rPr sz="3000" b="1" i="0">
                 <a:solidFill>
-                  <a:srgbClr val="492713"/>
+                  <a:srgbClr val="26231F"/>
                 </a:solidFill>
               </a:rPr>
               <a:t>한눈에 비교</a:t>
@@ -4961,26 +5256,26 @@
       </p:sp>
       <p:sp>
         <p:nvSpPr>
-          <p:cNvPr id="5" name="왼쪽 칸"/>
+          <p:cNvPr id="7" name="왼쪽 칸"/>
           <p:cNvSpPr/>
           <p:nvPr/>
         </p:nvSpPr>
         <p:spPr>
           <a:xfrm>
-            <a:off x="822960" y="1554480"/>
-            <a:ext cx="5090007" cy="4617720"/>
+            <a:off x="640080" y="1600200"/>
+            <a:ext cx="5272887" cy="3291840"/>
           </a:xfrm>
           <a:prstGeom prst="roundRect">
             <a:avLst>
-              <a:gd name="adj" fmla="val 8000"/>
+              <a:gd name="adj" fmla="val 7000"/>
             </a:avLst>
           </a:prstGeom>
           <a:solidFill>
-            <a:srgbClr val="FBF3EF"/>
+            <a:srgbClr val="FFFFFF"/>
           </a:solidFill>
           <a:ln w="12700">
             <a:solidFill>
-              <a:srgbClr val="F4DBCD"/>
+              <a:srgbClr val="EBC4AD"/>
             </a:solidFill>
           </a:ln>
         </p:spPr>
@@ -4994,14 +5289,14 @@
       </p:sp>
       <p:sp>
         <p:nvSpPr>
-          <p:cNvPr id="6" name="칸 제목 바"/>
+          <p:cNvPr id="8" name="칸 제목 바"/>
           <p:cNvSpPr/>
           <p:nvPr/>
         </p:nvSpPr>
         <p:spPr>
           <a:xfrm>
-            <a:off x="822960" y="1554480"/>
-            <a:ext cx="5090007" cy="640080"/>
+            <a:off x="640080" y="1600200"/>
+            <a:ext cx="5272887" cy="640080"/>
           </a:xfrm>
           <a:prstGeom prst="roundRect">
             <a:avLst>
@@ -5009,7 +5304,7 @@
             </a:avLst>
           </a:prstGeom>
           <a:solidFill>
-            <a:srgbClr val="995229"/>
+            <a:srgbClr val="D89C79"/>
           </a:solidFill>
           <a:ln>
             <a:noFill/>
@@ -5025,14 +5320,14 @@
       </p:sp>
       <p:sp>
         <p:nvSpPr>
-          <p:cNvPr id="7" name="TextBox 6"/>
+          <p:cNvPr id="9" name="TextBox 8"/>
           <p:cNvSpPr txBox="1"/>
           <p:nvPr/>
         </p:nvSpPr>
         <p:spPr>
           <a:xfrm>
-            <a:off x="1005840" y="1554480"/>
-            <a:ext cx="4724247" cy="640080"/>
+            <a:off x="822959" y="1600200"/>
+            <a:ext cx="4907127" cy="640080"/>
           </a:xfrm>
           <a:prstGeom prst="rect">
             <a:avLst/>
@@ -5053,7 +5348,7 @@
             <a:r>
               <a:rPr sz="1800" b="1" i="0">
                 <a:solidFill>
-                  <a:srgbClr val="FFFFFF"/>
+                  <a:srgbClr val="26231F"/>
                 </a:solidFill>
               </a:rPr>
               <a:t>계획</a:t>
@@ -5063,14 +5358,14 @@
       </p:sp>
       <p:sp>
         <p:nvSpPr>
-          <p:cNvPr id="8" name="TextBox 7"/>
+          <p:cNvPr id="10" name="TextBox 9"/>
           <p:cNvSpPr txBox="1"/>
           <p:nvPr/>
         </p:nvSpPr>
         <p:spPr>
           <a:xfrm>
-            <a:off x="1051560" y="2377440"/>
-            <a:ext cx="4632807" cy="3703320"/>
+            <a:off x="868680" y="2423160"/>
+            <a:ext cx="4815687" cy="2377440"/>
           </a:xfrm>
           <a:prstGeom prst="rect">
             <a:avLst/>
@@ -5096,7 +5391,7 @@
             <a:r>
               <a:rPr sz="1500" b="0" i="0">
                 <a:solidFill>
-                  <a:srgbClr val="2B2B2B"/>
+                  <a:srgbClr val="26231F"/>
                 </a:solidFill>
               </a:rPr>
               <a:t>내용을 입력하세요</a:t>
@@ -5116,7 +5411,7 @@
             <a:r>
               <a:rPr sz="1500" b="0" i="0">
                 <a:solidFill>
-                  <a:srgbClr val="2B2B2B"/>
+                  <a:srgbClr val="26231F"/>
                 </a:solidFill>
               </a:rPr>
               <a:t>내용을 입력하세요</a:t>
@@ -5136,7 +5431,7 @@
             <a:r>
               <a:rPr sz="1500" b="0" i="0">
                 <a:solidFill>
-                  <a:srgbClr val="2B2B2B"/>
+                  <a:srgbClr val="26231F"/>
                 </a:solidFill>
               </a:rPr>
               <a:t>내용을 입력하세요</a:t>
@@ -5146,26 +5441,26 @@
       </p:sp>
       <p:sp>
         <p:nvSpPr>
-          <p:cNvPr id="9" name="오른쪽 칸"/>
+          <p:cNvPr id="11" name="오른쪽 칸"/>
           <p:cNvSpPr/>
           <p:nvPr/>
         </p:nvSpPr>
         <p:spPr>
           <a:xfrm>
-            <a:off x="6278727" y="1554480"/>
-            <a:ext cx="5090007" cy="4617720"/>
+            <a:off x="6278727" y="1600200"/>
+            <a:ext cx="5272887" cy="3291840"/>
           </a:xfrm>
           <a:prstGeom prst="roundRect">
             <a:avLst>
-              <a:gd name="adj" fmla="val 8000"/>
+              <a:gd name="adj" fmla="val 7000"/>
             </a:avLst>
           </a:prstGeom>
           <a:solidFill>
-            <a:srgbClr val="F4DBCD"/>
+            <a:srgbClr val="FFFFFF"/>
           </a:solidFill>
           <a:ln w="12700">
             <a:solidFill>
-              <a:srgbClr val="F4DBCD"/>
+              <a:srgbClr val="EBC4AD"/>
             </a:solidFill>
           </a:ln>
         </p:spPr>
@@ -5179,14 +5474,14 @@
       </p:sp>
       <p:sp>
         <p:nvSpPr>
-          <p:cNvPr id="10" name="칸 제목 바"/>
+          <p:cNvPr id="12" name="칸 제목 바"/>
           <p:cNvSpPr/>
           <p:nvPr/>
         </p:nvSpPr>
         <p:spPr>
           <a:xfrm>
-            <a:off x="6278727" y="1554480"/>
-            <a:ext cx="5090007" cy="640080"/>
+            <a:off x="6278727" y="1600200"/>
+            <a:ext cx="5272887" cy="640080"/>
           </a:xfrm>
           <a:prstGeom prst="roundRect">
             <a:avLst>
@@ -5194,7 +5489,7 @@
             </a:avLst>
           </a:prstGeom>
           <a:solidFill>
-            <a:srgbClr val="492713"/>
+            <a:srgbClr val="493427"/>
           </a:solidFill>
           <a:ln>
             <a:noFill/>
@@ -5210,14 +5505,14 @@
       </p:sp>
       <p:sp>
         <p:nvSpPr>
-          <p:cNvPr id="11" name="TextBox 10"/>
+          <p:cNvPr id="13" name="TextBox 12"/>
           <p:cNvSpPr txBox="1"/>
           <p:nvPr/>
         </p:nvSpPr>
         <p:spPr>
           <a:xfrm>
-            <a:off x="6461607" y="1554480"/>
-            <a:ext cx="4724247" cy="640080"/>
+            <a:off x="6461607" y="1600200"/>
+            <a:ext cx="4907127" cy="640080"/>
           </a:xfrm>
           <a:prstGeom prst="rect">
             <a:avLst/>
@@ -5248,14 +5543,14 @@
       </p:sp>
       <p:sp>
         <p:nvSpPr>
-          <p:cNvPr id="12" name="TextBox 11"/>
+          <p:cNvPr id="14" name="TextBox 13"/>
           <p:cNvSpPr txBox="1"/>
           <p:nvPr/>
         </p:nvSpPr>
         <p:spPr>
           <a:xfrm>
-            <a:off x="6507327" y="2377440"/>
-            <a:ext cx="4632807" cy="3703320"/>
+            <a:off x="6507327" y="2423160"/>
+            <a:ext cx="4815687" cy="2377440"/>
           </a:xfrm>
           <a:prstGeom prst="rect">
             <a:avLst/>
@@ -5281,7 +5576,7 @@
             <a:r>
               <a:rPr sz="1500" b="0" i="0">
                 <a:solidFill>
-                  <a:srgbClr val="2B2B2B"/>
+                  <a:srgbClr val="26231F"/>
                 </a:solidFill>
               </a:rPr>
               <a:t>내용을 입력하세요</a:t>
@@ -5301,7 +5596,7 @@
             <a:r>
               <a:rPr sz="1500" b="0" i="0">
                 <a:solidFill>
-                  <a:srgbClr val="2B2B2B"/>
+                  <a:srgbClr val="26231F"/>
                 </a:solidFill>
               </a:rPr>
               <a:t>내용을 입력하세요</a:t>
@@ -5321,7 +5616,7 @@
             <a:r>
               <a:rPr sz="1500" b="0" i="0">
                 <a:solidFill>
-                  <a:srgbClr val="2B2B2B"/>
+                  <a:srgbClr val="26231F"/>
                 </a:solidFill>
               </a:rPr>
               <a:t>내용을 입력하세요</a:t>
@@ -5343,7 +5638,7 @@
     <p:bg>
       <p:bgPr>
         <a:solidFill>
-          <a:srgbClr val="FBF3EF"/>
+          <a:srgbClr val="FFFFFF"/>
         </a:solidFill>
         <a:effectLst/>
       </p:bgPr>
@@ -5363,46 +5658,113 @@
         </p:nvSpPr>
         <p:spPr>
           <a:xfrm>
-            <a:off x="256032" y="256032"/>
-            <a:ext cx="11679631" cy="6345936"/>
+            <a:off x="0" y="6565392"/>
+            <a:ext cx="12191695" cy="292608"/>
+          </a:xfrm>
+          <a:prstGeom prst="rect">
+            <a:avLst/>
+          </a:prstGeom>
+          <a:solidFill>
+            <a:srgbClr val="EBC4AD"/>
+          </a:solidFill>
+          <a:ln>
+            <a:noFill/>
+          </a:ln>
+        </p:spPr>
+        <p:txBody>
+          <a:bodyPr rtlCol="0" anchor="ctr"/>
+          <a:lstStyle/>
+          <a:p>
+            <a:pPr algn="ctr"/>
+          </a:p>
+        </p:txBody>
+      </p:sp>
+      <p:sp>
+        <p:nvSpPr>
+          <p:cNvPr id="4" name="장식"/>
+          <p:cNvSpPr/>
+          <p:nvPr/>
+        </p:nvSpPr>
+        <p:spPr>
+          <a:xfrm>
+            <a:off x="640080" y="6400800"/>
+            <a:ext cx="10911535" cy="10972"/>
+          </a:xfrm>
+          <a:prstGeom prst="rect">
+            <a:avLst/>
+          </a:prstGeom>
+          <a:solidFill>
+            <a:srgbClr val="26231F"/>
+          </a:solidFill>
+          <a:ln>
+            <a:noFill/>
+          </a:ln>
+        </p:spPr>
+        <p:txBody>
+          <a:bodyPr rtlCol="0" anchor="ctr"/>
+          <a:lstStyle/>
+          <a:p>
+            <a:pPr algn="ctr"/>
+          </a:p>
+        </p:txBody>
+      </p:sp>
+      <p:sp>
+        <p:nvSpPr>
+          <p:cNvPr id="5" name="하단 라벨"/>
+          <p:cNvSpPr txBox="1"/>
+          <p:nvPr/>
+        </p:nvSpPr>
+        <p:spPr>
+          <a:xfrm>
+            <a:off x="640080" y="6437376"/>
+            <a:ext cx="5486400" cy="274320"/>
           </a:xfrm>
           <a:prstGeom prst="rect">
             <a:avLst/>
           </a:prstGeom>
           <a:noFill/>
-          <a:ln w="28575">
-            <a:solidFill>
-              <a:srgbClr val="995229"/>
-            </a:solidFill>
-          </a:ln>
-        </p:spPr>
-        <p:txBody>
-          <a:bodyPr rtlCol="0" anchor="ctr"/>
-          <a:lstStyle/>
-          <a:p>
-            <a:pPr algn="ctr"/>
-          </a:p>
-        </p:txBody>
-      </p:sp>
-      <p:sp>
-        <p:nvSpPr>
-          <p:cNvPr id="4" name="장식"/>
+        </p:spPr>
+        <p:txBody>
+          <a:bodyPr wrap="square" lIns="54864" rIns="54864" tIns="27432" bIns="27432" anchor="ctr">
+            <a:noAutofit/>
+          </a:bodyPr>
+          <a:lstStyle/>
+          <a:p>
+            <a:pPr algn="l">
+              <a:lnSpc>
+                <a:spcPct val="115000"/>
+              </a:lnSpc>
+            </a:pPr>
+            <a:r>
+              <a:rPr sz="900" b="1" i="0" spc="250">
+                <a:solidFill>
+                  <a:srgbClr val="26231F"/>
+                </a:solidFill>
+              </a:rPr>
+              <a:t>PRESENTATION</a:t>
+            </a:r>
+          </a:p>
+        </p:txBody>
+      </p:sp>
+      <p:sp>
+        <p:nvSpPr>
+          <p:cNvPr id="6" name="포인트"/>
           <p:cNvSpPr/>
           <p:nvPr/>
         </p:nvSpPr>
         <p:spPr>
-          <a:xfrm>
-            <a:off x="384048" y="384048"/>
-            <a:ext cx="11423599" cy="6089904"/>
-          </a:xfrm>
-          <a:prstGeom prst="rect">
+          <a:xfrm rot="18900000">
+            <a:off x="11213287" y="6473952"/>
+            <a:ext cx="219456" cy="219456"/>
+          </a:xfrm>
+          <a:prstGeom prst="teardrop">
             <a:avLst/>
           </a:prstGeom>
-          <a:noFill/>
-          <a:ln w="9525">
-            <a:solidFill>
-              <a:srgbClr val="F4DBCD"/>
-            </a:solidFill>
+          <a:solidFill>
+            <a:srgbClr val="D89C79"/>
+          </a:solidFill>
+          <a:ln>
+            <a:noFill/>
           </a:ln>
         </p:spPr>
         <p:txBody>
@@ -5425,8 +5787,8 @@
         </p:nvSpPr>
         <p:spPr>
           <a:xfrm>
-            <a:off x="822960" y="548640"/>
-            <a:ext cx="9265615" cy="822960"/>
+            <a:off x="640080" y="502920"/>
+            <a:ext cx="10911535" cy="914400"/>
           </a:xfrm>
         </p:spPr>
         <p:txBody>
@@ -5443,7 +5805,7 @@
             <a:r>
               <a:rPr sz="3000" b="1" i="0">
                 <a:solidFill>
-                  <a:srgbClr val="492713"/>
+                  <a:srgbClr val="26231F"/>
                 </a:solidFill>
               </a:rPr>
               <a:t>일정·현황</a:t>
@@ -5453,15 +5815,15 @@
       </p:sp>
       <p:graphicFrame>
         <p:nvGraphicFramePr>
-          <p:cNvPr id="5" name="표"/>
+          <p:cNvPr id="7" name="표"/>
           <p:cNvGraphicFramePr>
             <a:graphicFrameLocks noGrp="1"/>
           </p:cNvGraphicFramePr>
           <p:nvPr/>
         </p:nvGraphicFramePr>
         <p:xfrm>
-          <a:off x="822960" y="1554480"/>
-          <a:ext cx="10545772" cy="3840480"/>
+          <a:off x="640080" y="1600200"/>
+          <a:ext cx="10911532" cy="3840480"/>
         </p:xfrm>
         <a:graphic>
           <a:graphicData uri="http://schemas.openxmlformats.org/drawingml/2006/table">
@@ -5470,10 +5832,10 @@
                 <a:tableStyleId>{5C22544A-7EE6-4342-B048-85BDC9FD1C3A}</a:tableStyleId>
               </a:tblPr>
               <a:tblGrid>
-                <a:gridCol w="2636443"/>
-                <a:gridCol w="2636443"/>
-                <a:gridCol w="2636443"/>
-                <a:gridCol w="2636443"/>
+                <a:gridCol w="2727883"/>
+                <a:gridCol w="2727883"/>
+                <a:gridCol w="2727883"/>
+                <a:gridCol w="2727883"/>
               </a:tblGrid>
               <a:tr h="640080">
                 <a:tc>
@@ -5485,7 +5847,7 @@
                       <a:r>
                         <a:rPr sz="1500" b="1">
                           <a:solidFill>
-                            <a:srgbClr val="FFFFFF"/>
+                            <a:srgbClr val="26231F"/>
                           </a:solidFill>
                         </a:rPr>
                         <a:t>항목</a:t>
@@ -5495,30 +5857,30 @@
                   <a:tcPr anchor="ctr" marL="73152" marR="73152">
                     <a:lnL w="9525" cap="flat" cmpd="sng" algn="ctr">
                       <a:solidFill>
-                        <a:srgbClr val="995229"/>
+                        <a:srgbClr val="D89C79"/>
                       </a:solidFill>
                       <a:prstDash val="solid"/>
                     </a:lnL>
                     <a:lnR w="9525" cap="flat" cmpd="sng" algn="ctr">
                       <a:solidFill>
-                        <a:srgbClr val="995229"/>
+                        <a:srgbClr val="D89C79"/>
                       </a:solidFill>
                       <a:prstDash val="solid"/>
                     </a:lnR>
                     <a:lnT w="9525" cap="flat" cmpd="sng" algn="ctr">
                       <a:solidFill>
-                        <a:srgbClr val="995229"/>
+                        <a:srgbClr val="D89C79"/>
                       </a:solidFill>
                       <a:prstDash val="solid"/>
                     </a:lnT>
                     <a:lnB w="9525" cap="flat" cmpd="sng" algn="ctr">
                       <a:solidFill>
-                        <a:srgbClr val="995229"/>
+                        <a:srgbClr val="D89C79"/>
                       </a:solidFill>
                       <a:prstDash val="solid"/>
                     </a:lnB>
                     <a:solidFill>
-                      <a:srgbClr val="995229"/>
+                      <a:srgbClr val="D89C79"/>
                     </a:solidFill>
                   </a:tcPr>
                 </a:tc>
@@ -5531,7 +5893,7 @@
                       <a:r>
                         <a:rPr sz="1500" b="1">
                           <a:solidFill>
-                            <a:srgbClr val="FFFFFF"/>
+                            <a:srgbClr val="26231F"/>
                           </a:solidFill>
                         </a:rPr>
                         <a:t>목표</a:t>
@@ -5541,30 +5903,30 @@
                   <a:tcPr anchor="ctr" marL="73152" marR="73152">
                     <a:lnL w="9525" cap="flat" cmpd="sng" algn="ctr">
                       <a:solidFill>
-                        <a:srgbClr val="995229"/>
+                        <a:srgbClr val="D89C79"/>
                       </a:solidFill>
                       <a:prstDash val="solid"/>
                     </a:lnL>
                     <a:lnR w="9525" cap="flat" cmpd="sng" algn="ctr">
                       <a:solidFill>
-                        <a:srgbClr val="995229"/>
+                        <a:srgbClr val="D89C79"/>
                       </a:solidFill>
                       <a:prstDash val="solid"/>
                     </a:lnR>
                     <a:lnT w="9525" cap="flat" cmpd="sng" algn="ctr">
                       <a:solidFill>
-                        <a:srgbClr val="995229"/>
+                        <a:srgbClr val="D89C79"/>
                       </a:solidFill>
                       <a:prstDash val="solid"/>
                     </a:lnT>
                     <a:lnB w="9525" cap="flat" cmpd="sng" algn="ctr">
                       <a:solidFill>
-                        <a:srgbClr val="995229"/>
+                        <a:srgbClr val="D89C79"/>
                       </a:solidFill>
                       <a:prstDash val="solid"/>
                     </a:lnB>
                     <a:solidFill>
-                      <a:srgbClr val="995229"/>
+                      <a:srgbClr val="D89C79"/>
                     </a:solidFill>
                   </a:tcPr>
                 </a:tc>
@@ -5577,7 +5939,7 @@
                       <a:r>
                         <a:rPr sz="1500" b="1">
                           <a:solidFill>
-                            <a:srgbClr val="FFFFFF"/>
+                            <a:srgbClr val="26231F"/>
                           </a:solidFill>
                         </a:rPr>
                         <a:t>실적</a:t>
@@ -5587,30 +5949,30 @@
                   <a:tcPr anchor="ctr" marL="73152" marR="73152">
                     <a:lnL w="9525" cap="flat" cmpd="sng" algn="ctr">
                       <a:solidFill>
-                        <a:srgbClr val="995229"/>
+                        <a:srgbClr val="D89C79"/>
                       </a:solidFill>
                       <a:prstDash val="solid"/>
                     </a:lnL>
                     <a:lnR w="9525" cap="flat" cmpd="sng" algn="ctr">
                       <a:solidFill>
-                        <a:srgbClr val="995229"/>
+                        <a:srgbClr val="D89C79"/>
                       </a:solidFill>
                       <a:prstDash val="solid"/>
                     </a:lnR>
                     <a:lnT w="9525" cap="flat" cmpd="sng" algn="ctr">
                       <a:solidFill>
-                        <a:srgbClr val="995229"/>
+                        <a:srgbClr val="D89C79"/>
                       </a:solidFill>
                       <a:prstDash val="solid"/>
                     </a:lnT>
                     <a:lnB w="9525" cap="flat" cmpd="sng" algn="ctr">
                       <a:solidFill>
-                        <a:srgbClr val="995229"/>
+                        <a:srgbClr val="D89C79"/>
                       </a:solidFill>
                       <a:prstDash val="solid"/>
                     </a:lnB>
                     <a:solidFill>
-                      <a:srgbClr val="995229"/>
+                      <a:srgbClr val="D89C79"/>
                     </a:solidFill>
                   </a:tcPr>
                 </a:tc>
@@ -5623,7 +5985,7 @@
                       <a:r>
                         <a:rPr sz="1500" b="1">
                           <a:solidFill>
-                            <a:srgbClr val="FFFFFF"/>
+                            <a:srgbClr val="26231F"/>
                           </a:solidFill>
                         </a:rPr>
                         <a:t>달성률</a:t>
@@ -5633,30 +5995,30 @@
                   <a:tcPr anchor="ctr" marL="73152" marR="73152">
                     <a:lnL w="9525" cap="flat" cmpd="sng" algn="ctr">
                       <a:solidFill>
-                        <a:srgbClr val="995229"/>
+                        <a:srgbClr val="D89C79"/>
                       </a:solidFill>
                       <a:prstDash val="solid"/>
                     </a:lnL>
                     <a:lnR w="9525" cap="flat" cmpd="sng" algn="ctr">
                       <a:solidFill>
-                        <a:srgbClr val="995229"/>
+                        <a:srgbClr val="D89C79"/>
                       </a:solidFill>
                       <a:prstDash val="solid"/>
                     </a:lnR>
                     <a:lnT w="9525" cap="flat" cmpd="sng" algn="ctr">
                       <a:solidFill>
-                        <a:srgbClr val="995229"/>
+                        <a:srgbClr val="D89C79"/>
                       </a:solidFill>
                       <a:prstDash val="solid"/>
                     </a:lnT>
                     <a:lnB w="9525" cap="flat" cmpd="sng" algn="ctr">
                       <a:solidFill>
-                        <a:srgbClr val="995229"/>
+                        <a:srgbClr val="D89C79"/>
                       </a:solidFill>
                       <a:prstDash val="solid"/>
                     </a:lnB>
                     <a:solidFill>
-                      <a:srgbClr val="995229"/>
+                      <a:srgbClr val="D89C79"/>
                     </a:solidFill>
                   </a:tcPr>
                 </a:tc>
@@ -5671,7 +6033,7 @@
                       <a:r>
                         <a:rPr sz="1500" b="1">
                           <a:solidFill>
-                            <a:srgbClr val="492713"/>
+                            <a:srgbClr val="493427"/>
                           </a:solidFill>
                         </a:rPr>
                         <a:t>1</a:t>
@@ -5681,30 +6043,30 @@
                   <a:tcPr anchor="ctr" marL="73152" marR="73152">
                     <a:lnL w="9525" cap="flat" cmpd="sng" algn="ctr">
                       <a:solidFill>
-                        <a:srgbClr val="F4DBCD"/>
+                        <a:srgbClr val="F6E1D5"/>
                       </a:solidFill>
                       <a:prstDash val="solid"/>
                     </a:lnL>
                     <a:lnR w="9525" cap="flat" cmpd="sng" algn="ctr">
                       <a:solidFill>
-                        <a:srgbClr val="F4DBCD"/>
+                        <a:srgbClr val="F6E1D5"/>
                       </a:solidFill>
                       <a:prstDash val="solid"/>
                     </a:lnR>
                     <a:lnT w="9525" cap="flat" cmpd="sng" algn="ctr">
                       <a:solidFill>
-                        <a:srgbClr val="F4DBCD"/>
+                        <a:srgbClr val="F6E1D5"/>
                       </a:solidFill>
                       <a:prstDash val="solid"/>
                     </a:lnT>
                     <a:lnB w="9525" cap="flat" cmpd="sng" algn="ctr">
                       <a:solidFill>
-                        <a:srgbClr val="F4DBCD"/>
+                        <a:srgbClr val="F6E1D5"/>
                       </a:solidFill>
                       <a:prstDash val="solid"/>
                     </a:lnB>
                     <a:solidFill>
-                      <a:srgbClr val="F4DBCD"/>
+                      <a:srgbClr val="F6E1D5"/>
                     </a:solidFill>
                   </a:tcPr>
                 </a:tc>
@@ -5717,7 +6079,7 @@
                       <a:r>
                         <a:rPr sz="1500" b="0">
                           <a:solidFill>
-                            <a:srgbClr val="2B2B2B"/>
+                            <a:srgbClr val="26231F"/>
                           </a:solidFill>
                         </a:rPr>
                         <a:t>내용 입력</a:t>
@@ -5727,25 +6089,25 @@
                   <a:tcPr anchor="ctr" marL="73152" marR="73152">
                     <a:lnL w="9525" cap="flat" cmpd="sng" algn="ctr">
                       <a:solidFill>
-                        <a:srgbClr val="F4DBCD"/>
+                        <a:srgbClr val="F6E1D5"/>
                       </a:solidFill>
                       <a:prstDash val="solid"/>
                     </a:lnL>
                     <a:lnR w="9525" cap="flat" cmpd="sng" algn="ctr">
                       <a:solidFill>
-                        <a:srgbClr val="F4DBCD"/>
+                        <a:srgbClr val="F6E1D5"/>
                       </a:solidFill>
                       <a:prstDash val="solid"/>
                     </a:lnR>
                     <a:lnT w="9525" cap="flat" cmpd="sng" algn="ctr">
                       <a:solidFill>
-                        <a:srgbClr val="F4DBCD"/>
+                        <a:srgbClr val="F6E1D5"/>
                       </a:solidFill>
                       <a:prstDash val="solid"/>
                     </a:lnT>
                     <a:lnB w="9525" cap="flat" cmpd="sng" algn="ctr">
                       <a:solidFill>
-                        <a:srgbClr val="F4DBCD"/>
+                        <a:srgbClr val="F6E1D5"/>
                       </a:solidFill>
                       <a:prstDash val="solid"/>
                     </a:lnB>
@@ -5763,7 +6125,7 @@
                       <a:r>
                         <a:rPr sz="1500" b="0">
                           <a:solidFill>
-                            <a:srgbClr val="2B2B2B"/>
+                            <a:srgbClr val="26231F"/>
                           </a:solidFill>
                         </a:rPr>
                         <a:t/>
@@ -5773,25 +6135,25 @@
                   <a:tcPr anchor="ctr" marL="73152" marR="73152">
                     <a:lnL w="9525" cap="flat" cmpd="sng" algn="ctr">
                       <a:solidFill>
-                        <a:srgbClr val="F4DBCD"/>
+                        <a:srgbClr val="F6E1D5"/>
                       </a:solidFill>
                       <a:prstDash val="solid"/>
                     </a:lnL>
                     <a:lnR w="9525" cap="flat" cmpd="sng" algn="ctr">
                       <a:solidFill>
-                        <a:srgbClr val="F4DBCD"/>
+                        <a:srgbClr val="F6E1D5"/>
                       </a:solidFill>
                       <a:prstDash val="solid"/>
                     </a:lnR>
                     <a:lnT w="9525" cap="flat" cmpd="sng" algn="ctr">
                       <a:solidFill>
-                        <a:srgbClr val="F4DBCD"/>
+                        <a:srgbClr val="F6E1D5"/>
                       </a:solidFill>
                       <a:prstDash val="solid"/>
                     </a:lnT>
                     <a:lnB w="9525" cap="flat" cmpd="sng" algn="ctr">
                       <a:solidFill>
-                        <a:srgbClr val="F4DBCD"/>
+                        <a:srgbClr val="F6E1D5"/>
                       </a:solidFill>
                       <a:prstDash val="solid"/>
                     </a:lnB>
@@ -5809,7 +6171,7 @@
                       <a:r>
                         <a:rPr sz="1500" b="0">
                           <a:solidFill>
-                            <a:srgbClr val="2B2B2B"/>
+                            <a:srgbClr val="26231F"/>
                           </a:solidFill>
                         </a:rPr>
                         <a:t/>
@@ -5819,25 +6181,25 @@
                   <a:tcPr anchor="ctr" marL="73152" marR="73152">
                     <a:lnL w="9525" cap="flat" cmpd="sng" algn="ctr">
                       <a:solidFill>
-                        <a:srgbClr val="F4DBCD"/>
+                        <a:srgbClr val="F6E1D5"/>
                       </a:solidFill>
                       <a:prstDash val="solid"/>
                     </a:lnL>
                     <a:lnR w="9525" cap="flat" cmpd="sng" algn="ctr">
                       <a:solidFill>
-                        <a:srgbClr val="F4DBCD"/>
+                        <a:srgbClr val="F6E1D5"/>
                       </a:solidFill>
                       <a:prstDash val="solid"/>
                     </a:lnR>
                     <a:lnT w="9525" cap="flat" cmpd="sng" algn="ctr">
                       <a:solidFill>
-                        <a:srgbClr val="F4DBCD"/>
+                        <a:srgbClr val="F6E1D5"/>
                       </a:solidFill>
                       <a:prstDash val="solid"/>
                     </a:lnT>
                     <a:lnB w="9525" cap="flat" cmpd="sng" algn="ctr">
                       <a:solidFill>
-                        <a:srgbClr val="F4DBCD"/>
+                        <a:srgbClr val="F6E1D5"/>
                       </a:solidFill>
                       <a:prstDash val="solid"/>
                     </a:lnB>
@@ -5857,7 +6219,7 @@
                       <a:r>
                         <a:rPr sz="1500" b="1">
                           <a:solidFill>
-                            <a:srgbClr val="492713"/>
+                            <a:srgbClr val="493427"/>
                           </a:solidFill>
                         </a:rPr>
                         <a:t>2</a:t>
@@ -5867,30 +6229,30 @@
                   <a:tcPr anchor="ctr" marL="73152" marR="73152">
                     <a:lnL w="9525" cap="flat" cmpd="sng" algn="ctr">
                       <a:solidFill>
-                        <a:srgbClr val="F4DBCD"/>
+                        <a:srgbClr val="F6E1D5"/>
                       </a:solidFill>
                       <a:prstDash val="solid"/>
                     </a:lnL>
                     <a:lnR w="9525" cap="flat" cmpd="sng" algn="ctr">
                       <a:solidFill>
-                        <a:srgbClr val="F4DBCD"/>
+                        <a:srgbClr val="F6E1D5"/>
                       </a:solidFill>
                       <a:prstDash val="solid"/>
                     </a:lnR>
                     <a:lnT w="9525" cap="flat" cmpd="sng" algn="ctr">
                       <a:solidFill>
-                        <a:srgbClr val="F4DBCD"/>
+                        <a:srgbClr val="F6E1D5"/>
                       </a:solidFill>
                       <a:prstDash val="solid"/>
                     </a:lnT>
                     <a:lnB w="9525" cap="flat" cmpd="sng" algn="ctr">
                       <a:solidFill>
-                        <a:srgbClr val="F4DBCD"/>
+                        <a:srgbClr val="F6E1D5"/>
                       </a:solidFill>
                       <a:prstDash val="solid"/>
                     </a:lnB>
                     <a:solidFill>
-                      <a:srgbClr val="F4DBCD"/>
+                      <a:srgbClr val="F6E1D5"/>
                     </a:solidFill>
                   </a:tcPr>
                 </a:tc>
@@ -5903,7 +6265,7 @@
                       <a:r>
                         <a:rPr sz="1500" b="0">
                           <a:solidFill>
-                            <a:srgbClr val="2B2B2B"/>
+                            <a:srgbClr val="26231F"/>
                           </a:solidFill>
                         </a:rPr>
                         <a:t>내용 입력</a:t>
@@ -5913,30 +6275,30 @@
                   <a:tcPr anchor="ctr" marL="73152" marR="73152">
                     <a:lnL w="9525" cap="flat" cmpd="sng" algn="ctr">
                       <a:solidFill>
-                        <a:srgbClr val="F4DBCD"/>
+                        <a:srgbClr val="F6E1D5"/>
                       </a:solidFill>
                       <a:prstDash val="solid"/>
                     </a:lnL>
                     <a:lnR w="9525" cap="flat" cmpd="sng" algn="ctr">
                       <a:solidFill>
-                        <a:srgbClr val="F4DBCD"/>
+                        <a:srgbClr val="F6E1D5"/>
                       </a:solidFill>
                       <a:prstDash val="solid"/>
                     </a:lnR>
                     <a:lnT w="9525" cap="flat" cmpd="sng" algn="ctr">
                       <a:solidFill>
-                        <a:srgbClr val="F4DBCD"/>
+                        <a:srgbClr val="F6E1D5"/>
                       </a:solidFill>
                       <a:prstDash val="solid"/>
                     </a:lnT>
                     <a:lnB w="9525" cap="flat" cmpd="sng" algn="ctr">
                       <a:solidFill>
-                        <a:srgbClr val="F4DBCD"/>
+                        <a:srgbClr val="F6E1D5"/>
                       </a:solidFill>
                       <a:prstDash val="solid"/>
                     </a:lnB>
                     <a:solidFill>
-                      <a:srgbClr val="FBF3EF"/>
+                      <a:srgbClr val="FBF2EC"/>
                     </a:solidFill>
                   </a:tcPr>
                 </a:tc>
@@ -5949,7 +6311,7 @@
                       <a:r>
                         <a:rPr sz="1500" b="0">
                           <a:solidFill>
-                            <a:srgbClr val="2B2B2B"/>
+                            <a:srgbClr val="26231F"/>
                           </a:solidFill>
                         </a:rPr>
                         <a:t/>
@@ -5959,30 +6321,30 @@
                   <a:tcPr anchor="ctr" marL="73152" marR="73152">
                     <a:lnL w="9525" cap="flat" cmpd="sng" algn="ctr">
                       <a:solidFill>
-                        <a:srgbClr val="F4DBCD"/>
+                        <a:srgbClr val="F6E1D5"/>
                       </a:solidFill>
                       <a:prstDash val="solid"/>
                     </a:lnL>
                     <a:lnR w="9525" cap="flat" cmpd="sng" algn="ctr">
                       <a:solidFill>
-                        <a:srgbClr val="F4DBCD"/>
+                        <a:srgbClr val="F6E1D5"/>
                       </a:solidFill>
                       <a:prstDash val="solid"/>
                     </a:lnR>
                     <a:lnT w="9525" cap="flat" cmpd="sng" algn="ctr">
                       <a:solidFill>
-                        <a:srgbClr val="F4DBCD"/>
+                        <a:srgbClr val="F6E1D5"/>
                       </a:solidFill>
                       <a:prstDash val="solid"/>
                     </a:lnT>
                     <a:lnB w="9525" cap="flat" cmpd="sng" algn="ctr">
                       <a:solidFill>
-                        <a:srgbClr val="F4DBCD"/>
+                        <a:srgbClr val="F6E1D5"/>
                       </a:solidFill>
                       <a:prstDash val="solid"/>
                     </a:lnB>
                     <a:solidFill>
-                      <a:srgbClr val="FBF3EF"/>
+                      <a:srgbClr val="FBF2EC"/>
                     </a:solidFill>
                   </a:tcPr>
                 </a:tc>
@@ -5995,7 +6357,7 @@
                       <a:r>
                         <a:rPr sz="1500" b="0">
                           <a:solidFill>
-                            <a:srgbClr val="2B2B2B"/>
+                            <a:srgbClr val="26231F"/>
                           </a:solidFill>
                         </a:rPr>
                         <a:t/>
@@ -6005,30 +6367,30 @@
                   <a:tcPr anchor="ctr" marL="73152" marR="73152">
                     <a:lnL w="9525" cap="flat" cmpd="sng" algn="ctr">
                       <a:solidFill>
-                        <a:srgbClr val="F4DBCD"/>
+                        <a:srgbClr val="F6E1D5"/>
                       </a:solidFill>
                       <a:prstDash val="solid"/>
                     </a:lnL>
                     <a:lnR w="9525" cap="flat" cmpd="sng" algn="ctr">
                       <a:solidFill>
-                        <a:srgbClr val="F4DBCD"/>
+                        <a:srgbClr val="F6E1D5"/>
                       </a:solidFill>
                       <a:prstDash val="solid"/>
                     </a:lnR>
                     <a:lnT w="9525" cap="flat" cmpd="sng" algn="ctr">
                       <a:solidFill>
-                        <a:srgbClr val="F4DBCD"/>
+                        <a:srgbClr val="F6E1D5"/>
                       </a:solidFill>
                       <a:prstDash val="solid"/>
                     </a:lnT>
                     <a:lnB w="9525" cap="flat" cmpd="sng" algn="ctr">
                       <a:solidFill>
-                        <a:srgbClr val="F4DBCD"/>
+                        <a:srgbClr val="F6E1D5"/>
                       </a:solidFill>
                       <a:prstDash val="solid"/>
                     </a:lnB>
                     <a:solidFill>
-                      <a:srgbClr val="FBF3EF"/>
+                      <a:srgbClr val="FBF2EC"/>
                     </a:solidFill>
                   </a:tcPr>
                 </a:tc>
@@ -6043,7 +6405,7 @@
                       <a:r>
                         <a:rPr sz="1500" b="1">
                           <a:solidFill>
-                            <a:srgbClr val="492713"/>
+                            <a:srgbClr val="493427"/>
                           </a:solidFill>
                         </a:rPr>
                         <a:t>3</a:t>
@@ -6053,30 +6415,30 @@
                   <a:tcPr anchor="ctr" marL="73152" marR="73152">
                     <a:lnL w="9525" cap="flat" cmpd="sng" algn="ctr">
                       <a:solidFill>
-                        <a:srgbClr val="F4DBCD"/>
+                        <a:srgbClr val="F6E1D5"/>
                       </a:solidFill>
                       <a:prstDash val="solid"/>
                     </a:lnL>
                     <a:lnR w="9525" cap="flat" cmpd="sng" algn="ctr">
                       <a:solidFill>
-                        <a:srgbClr val="F4DBCD"/>
+                        <a:srgbClr val="F6E1D5"/>
                       </a:solidFill>
                       <a:prstDash val="solid"/>
                     </a:lnR>
                     <a:lnT w="9525" cap="flat" cmpd="sng" algn="ctr">
                       <a:solidFill>
-                        <a:srgbClr val="F4DBCD"/>
+                        <a:srgbClr val="F6E1D5"/>
                       </a:solidFill>
                       <a:prstDash val="solid"/>
                     </a:lnT>
                     <a:lnB w="9525" cap="flat" cmpd="sng" algn="ctr">
                       <a:solidFill>
-                        <a:srgbClr val="F4DBCD"/>
+                        <a:srgbClr val="F6E1D5"/>
                       </a:solidFill>
                       <a:prstDash val="solid"/>
                     </a:lnB>
                     <a:solidFill>
-                      <a:srgbClr val="F4DBCD"/>
+                      <a:srgbClr val="F6E1D5"/>
                     </a:solidFill>
                   </a:tcPr>
                 </a:tc>
@@ -6089,7 +6451,7 @@
                       <a:r>
                         <a:rPr sz="1500" b="0">
                           <a:solidFill>
-                            <a:srgbClr val="2B2B2B"/>
+                            <a:srgbClr val="26231F"/>
                           </a:solidFill>
                         </a:rPr>
                         <a:t>내용 입력</a:t>
@@ -6099,25 +6461,25 @@
                   <a:tcPr anchor="ctr" marL="73152" marR="73152">
                     <a:lnL w="9525" cap="flat" cmpd="sng" algn="ctr">
                       <a:solidFill>
-                        <a:srgbClr val="F4DBCD"/>
+                        <a:srgbClr val="F6E1D5"/>
                       </a:solidFill>
                       <a:prstDash val="solid"/>
                     </a:lnL>
                     <a:lnR w="9525" cap="flat" cmpd="sng" algn="ctr">
                       <a:solidFill>
-                        <a:srgbClr val="F4DBCD"/>
+                        <a:srgbClr val="F6E1D5"/>
                       </a:solidFill>
                       <a:prstDash val="solid"/>
                     </a:lnR>
                     <a:lnT w="9525" cap="flat" cmpd="sng" algn="ctr">
                       <a:solidFill>
-                        <a:srgbClr val="F4DBCD"/>
+                        <a:srgbClr val="F6E1D5"/>
                       </a:solidFill>
                       <a:prstDash val="solid"/>
                     </a:lnT>
                     <a:lnB w="9525" cap="flat" cmpd="sng" algn="ctr">
                       <a:solidFill>
-                        <a:srgbClr val="F4DBCD"/>
+                        <a:srgbClr val="F6E1D5"/>
                       </a:solidFill>
                       <a:prstDash val="solid"/>
                     </a:lnB>
@@ -6135,7 +6497,7 @@
                       <a:r>
                         <a:rPr sz="1500" b="0">
                           <a:solidFill>
-                            <a:srgbClr val="2B2B2B"/>
+                            <a:srgbClr val="26231F"/>
                           </a:solidFill>
                         </a:rPr>
                         <a:t/>
@@ -6145,25 +6507,25 @@
                   <a:tcPr anchor="ctr" marL="73152" marR="73152">
                     <a:lnL w="9525" cap="flat" cmpd="sng" algn="ctr">
                       <a:solidFill>
-                        <a:srgbClr val="F4DBCD"/>
+                        <a:srgbClr val="F6E1D5"/>
                       </a:solidFill>
                       <a:prstDash val="solid"/>
                     </a:lnL>
                     <a:lnR w="9525" cap="flat" cmpd="sng" algn="ctr">
                       <a:solidFill>
-                        <a:srgbClr val="F4DBCD"/>
+                        <a:srgbClr val="F6E1D5"/>
                       </a:solidFill>
                       <a:prstDash val="solid"/>
                     </a:lnR>
                     <a:lnT w="9525" cap="flat" cmpd="sng" algn="ctr">
                       <a:solidFill>
-                        <a:srgbClr val="F4DBCD"/>
+                        <a:srgbClr val="F6E1D5"/>
                       </a:solidFill>
                       <a:prstDash val="solid"/>
                     </a:lnT>
                     <a:lnB w="9525" cap="flat" cmpd="sng" algn="ctr">
                       <a:solidFill>
-                        <a:srgbClr val="F4DBCD"/>
+                        <a:srgbClr val="F6E1D5"/>
                       </a:solidFill>
                       <a:prstDash val="solid"/>
                     </a:lnB>
@@ -6181,7 +6543,7 @@
                       <a:r>
                         <a:rPr sz="1500" b="0">
                           <a:solidFill>
-                            <a:srgbClr val="2B2B2B"/>
+                            <a:srgbClr val="26231F"/>
                           </a:solidFill>
                         </a:rPr>
                         <a:t/>
@@ -6191,25 +6553,25 @@
                   <a:tcPr anchor="ctr" marL="73152" marR="73152">
                     <a:lnL w="9525" cap="flat" cmpd="sng" algn="ctr">
                       <a:solidFill>
-                        <a:srgbClr val="F4DBCD"/>
+                        <a:srgbClr val="F6E1D5"/>
                       </a:solidFill>
                       <a:prstDash val="solid"/>
                     </a:lnL>
                     <a:lnR w="9525" cap="flat" cmpd="sng" algn="ctr">
                       <a:solidFill>
-                        <a:srgbClr val="F4DBCD"/>
+                        <a:srgbClr val="F6E1D5"/>
                       </a:solidFill>
                       <a:prstDash val="solid"/>
                     </a:lnR>
                     <a:lnT w="9525" cap="flat" cmpd="sng" algn="ctr">
                       <a:solidFill>
-                        <a:srgbClr val="F4DBCD"/>
+                        <a:srgbClr val="F6E1D5"/>
                       </a:solidFill>
                       <a:prstDash val="solid"/>
                     </a:lnT>
                     <a:lnB w="9525" cap="flat" cmpd="sng" algn="ctr">
                       <a:solidFill>
-                        <a:srgbClr val="F4DBCD"/>
+                        <a:srgbClr val="F6E1D5"/>
                       </a:solidFill>
                       <a:prstDash val="solid"/>
                     </a:lnB>
@@ -6229,7 +6591,7 @@
                       <a:r>
                         <a:rPr sz="1500" b="1">
                           <a:solidFill>
-                            <a:srgbClr val="492713"/>
+                            <a:srgbClr val="493427"/>
                           </a:solidFill>
                         </a:rPr>
                         <a:t>4</a:t>
@@ -6239,30 +6601,30 @@
                   <a:tcPr anchor="ctr" marL="73152" marR="73152">
                     <a:lnL w="9525" cap="flat" cmpd="sng" algn="ctr">
                       <a:solidFill>
-                        <a:srgbClr val="F4DBCD"/>
+                        <a:srgbClr val="F6E1D5"/>
                       </a:solidFill>
                       <a:prstDash val="solid"/>
                     </a:lnL>
                     <a:lnR w="9525" cap="flat" cmpd="sng" algn="ctr">
                       <a:solidFill>
-                        <a:srgbClr val="F4DBCD"/>
+                        <a:srgbClr val="F6E1D5"/>
                       </a:solidFill>
                       <a:prstDash val="solid"/>
                     </a:lnR>
                     <a:lnT w="9525" cap="flat" cmpd="sng" algn="ctr">
                       <a:solidFill>
-                        <a:srgbClr val="F4DBCD"/>
+                        <a:srgbClr val="F6E1D5"/>
                       </a:solidFill>
                       <a:prstDash val="solid"/>
                     </a:lnT>
                     <a:lnB w="9525" cap="flat" cmpd="sng" algn="ctr">
                       <a:solidFill>
-                        <a:srgbClr val="F4DBCD"/>
+                        <a:srgbClr val="F6E1D5"/>
                       </a:solidFill>
                       <a:prstDash val="solid"/>
                     </a:lnB>
                     <a:solidFill>
-                      <a:srgbClr val="F4DBCD"/>
+                      <a:srgbClr val="F6E1D5"/>
                     </a:solidFill>
                   </a:tcPr>
                 </a:tc>
@@ -6275,7 +6637,7 @@
                       <a:r>
                         <a:rPr sz="1500" b="0">
                           <a:solidFill>
-                            <a:srgbClr val="2B2B2B"/>
+                            <a:srgbClr val="26231F"/>
                           </a:solidFill>
                         </a:rPr>
                         <a:t>내용 입력</a:t>
@@ -6285,30 +6647,30 @@
                   <a:tcPr anchor="ctr" marL="73152" marR="73152">
                     <a:lnL w="9525" cap="flat" cmpd="sng" algn="ctr">
                       <a:solidFill>
-                        <a:srgbClr val="F4DBCD"/>
+                        <a:srgbClr val="F6E1D5"/>
                       </a:solidFill>
                       <a:prstDash val="solid"/>
                     </a:lnL>
                     <a:lnR w="9525" cap="flat" cmpd="sng" algn="ctr">
                       <a:solidFill>
-                        <a:srgbClr val="F4DBCD"/>
+                        <a:srgbClr val="F6E1D5"/>
                       </a:solidFill>
                       <a:prstDash val="solid"/>
                     </a:lnR>
                     <a:lnT w="9525" cap="flat" cmpd="sng" algn="ctr">
                       <a:solidFill>
-                        <a:srgbClr val="F4DBCD"/>
+                        <a:srgbClr val="F6E1D5"/>
                       </a:solidFill>
                       <a:prstDash val="solid"/>
                     </a:lnT>
                     <a:lnB w="9525" cap="flat" cmpd="sng" algn="ctr">
                       <a:solidFill>
-                        <a:srgbClr val="F4DBCD"/>
+                        <a:srgbClr val="F6E1D5"/>
                       </a:solidFill>
                       <a:prstDash val="solid"/>
                     </a:lnB>
                     <a:solidFill>
-                      <a:srgbClr val="FBF3EF"/>
+                      <a:srgbClr val="FBF2EC"/>
                     </a:solidFill>
                   </a:tcPr>
                 </a:tc>
@@ -6321,7 +6683,7 @@
                       <a:r>
                         <a:rPr sz="1500" b="0">
                           <a:solidFill>
-                            <a:srgbClr val="2B2B2B"/>
+                            <a:srgbClr val="26231F"/>
                           </a:solidFill>
                         </a:rPr>
                         <a:t/>
@@ -6331,30 +6693,30 @@
                   <a:tcPr anchor="ctr" marL="73152" marR="73152">
                     <a:lnL w="9525" cap="flat" cmpd="sng" algn="ctr">
                       <a:solidFill>
-                        <a:srgbClr val="F4DBCD"/>
+                        <a:srgbClr val="F6E1D5"/>
                       </a:solidFill>
                       <a:prstDash val="solid"/>
                     </a:lnL>
                     <a:lnR w="9525" cap="flat" cmpd="sng" algn="ctr">
                       <a:solidFill>
-                        <a:srgbClr val="F4DBCD"/>
+                        <a:srgbClr val="F6E1D5"/>
                       </a:solidFill>
                       <a:prstDash val="solid"/>
                     </a:lnR>
                     <a:lnT w="9525" cap="flat" cmpd="sng" algn="ctr">
                       <a:solidFill>
-                        <a:srgbClr val="F4DBCD"/>
+                        <a:srgbClr val="F6E1D5"/>
                       </a:solidFill>
                       <a:prstDash val="solid"/>
                     </a:lnT>
                     <a:lnB w="9525" cap="flat" cmpd="sng" algn="ctr">
                       <a:solidFill>
-                        <a:srgbClr val="F4DBCD"/>
+                        <a:srgbClr val="F6E1D5"/>
                       </a:solidFill>
                       <a:prstDash val="solid"/>
                     </a:lnB>
                     <a:solidFill>
-                      <a:srgbClr val="FBF3EF"/>
+                      <a:srgbClr val="FBF2EC"/>
                     </a:solidFill>
                   </a:tcPr>
                 </a:tc>
@@ -6367,7 +6729,7 @@
                       <a:r>
                         <a:rPr sz="1500" b="0">
                           <a:solidFill>
-                            <a:srgbClr val="2B2B2B"/>
+                            <a:srgbClr val="26231F"/>
                           </a:solidFill>
                         </a:rPr>
                         <a:t/>
@@ -6377,30 +6739,30 @@
                   <a:tcPr anchor="ctr" marL="73152" marR="73152">
                     <a:lnL w="9525" cap="flat" cmpd="sng" algn="ctr">
                       <a:solidFill>
-                        <a:srgbClr val="F4DBCD"/>
+                        <a:srgbClr val="F6E1D5"/>
                       </a:solidFill>
                       <a:prstDash val="solid"/>
                     </a:lnL>
                     <a:lnR w="9525" cap="flat" cmpd="sng" algn="ctr">
                       <a:solidFill>
-                        <a:srgbClr val="F4DBCD"/>
+                        <a:srgbClr val="F6E1D5"/>
                       </a:solidFill>
                       <a:prstDash val="solid"/>
                     </a:lnR>
                     <a:lnT w="9525" cap="flat" cmpd="sng" algn="ctr">
                       <a:solidFill>
-                        <a:srgbClr val="F4DBCD"/>
+                        <a:srgbClr val="F6E1D5"/>
                       </a:solidFill>
                       <a:prstDash val="solid"/>
                     </a:lnT>
                     <a:lnB w="9525" cap="flat" cmpd="sng" algn="ctr">
                       <a:solidFill>
-                        <a:srgbClr val="F4DBCD"/>
+                        <a:srgbClr val="F6E1D5"/>
                       </a:solidFill>
                       <a:prstDash val="solid"/>
                     </a:lnB>
                     <a:solidFill>
-                      <a:srgbClr val="FBF3EF"/>
+                      <a:srgbClr val="FBF2EC"/>
                     </a:solidFill>
                   </a:tcPr>
                 </a:tc>
@@ -6415,7 +6777,7 @@
                       <a:r>
                         <a:rPr sz="1500" b="1">
                           <a:solidFill>
-                            <a:srgbClr val="492713"/>
+                            <a:srgbClr val="493427"/>
                           </a:solidFill>
                         </a:rPr>
                         <a:t>5</a:t>
@@ -6425,30 +6787,30 @@
                   <a:tcPr anchor="ctr" marL="73152" marR="73152">
                     <a:lnL w="9525" cap="flat" cmpd="sng" algn="ctr">
                       <a:solidFill>
-                        <a:srgbClr val="F4DBCD"/>
+                        <a:srgbClr val="F6E1D5"/>
                       </a:solidFill>
                       <a:prstDash val="solid"/>
                     </a:lnL>
                     <a:lnR w="9525" cap="flat" cmpd="sng" algn="ctr">
                       <a:solidFill>
-                        <a:srgbClr val="F4DBCD"/>
+                        <a:srgbClr val="F6E1D5"/>
                       </a:solidFill>
                       <a:prstDash val="solid"/>
                     </a:lnR>
                     <a:lnT w="9525" cap="flat" cmpd="sng" algn="ctr">
                       <a:solidFill>
-                        <a:srgbClr val="F4DBCD"/>
+                        <a:srgbClr val="F6E1D5"/>
                       </a:solidFill>
                       <a:prstDash val="solid"/>
                     </a:lnT>
                     <a:lnB w="9525" cap="flat" cmpd="sng" algn="ctr">
                       <a:solidFill>
-                        <a:srgbClr val="F4DBCD"/>
+                        <a:srgbClr val="F6E1D5"/>
                       </a:solidFill>
                       <a:prstDash val="solid"/>
                     </a:lnB>
                     <a:solidFill>
-                      <a:srgbClr val="F4DBCD"/>
+                      <a:srgbClr val="F6E1D5"/>
                     </a:solidFill>
                   </a:tcPr>
                 </a:tc>
@@ -6461,7 +6823,7 @@
                       <a:r>
                         <a:rPr sz="1500" b="0">
                           <a:solidFill>
-                            <a:srgbClr val="2B2B2B"/>
+                            <a:srgbClr val="26231F"/>
                           </a:solidFill>
                         </a:rPr>
                         <a:t>내용 입력</a:t>
@@ -6471,25 +6833,25 @@
                   <a:tcPr anchor="ctr" marL="73152" marR="73152">
                     <a:lnL w="9525" cap="flat" cmpd="sng" algn="ctr">
                       <a:solidFill>
-                        <a:srgbClr val="F4DBCD"/>
+                        <a:srgbClr val="F6E1D5"/>
                       </a:solidFill>
                       <a:prstDash val="solid"/>
                     </a:lnL>
                     <a:lnR w="9525" cap="flat" cmpd="sng" algn="ctr">
                       <a:solidFill>
-                        <a:srgbClr val="F4DBCD"/>
+                        <a:srgbClr val="F6E1D5"/>
                       </a:solidFill>
                       <a:prstDash val="solid"/>
                     </a:lnR>
                     <a:lnT w="9525" cap="flat" cmpd="sng" algn="ctr">
                       <a:solidFill>
-                        <a:srgbClr val="F4DBCD"/>
+                        <a:srgbClr val="F6E1D5"/>
                       </a:solidFill>
                       <a:prstDash val="solid"/>
                     </a:lnT>
                     <a:lnB w="9525" cap="flat" cmpd="sng" algn="ctr">
                       <a:solidFill>
-                        <a:srgbClr val="F4DBCD"/>
+                        <a:srgbClr val="F6E1D5"/>
                       </a:solidFill>
                       <a:prstDash val="solid"/>
                     </a:lnB>
@@ -6507,7 +6869,7 @@
                       <a:r>
                         <a:rPr sz="1500" b="0">
                           <a:solidFill>
-                            <a:srgbClr val="2B2B2B"/>
+                            <a:srgbClr val="26231F"/>
                           </a:solidFill>
                         </a:rPr>
                         <a:t/>
@@ -6517,25 +6879,25 @@
                   <a:tcPr anchor="ctr" marL="73152" marR="73152">
                     <a:lnL w="9525" cap="flat" cmpd="sng" algn="ctr">
                       <a:solidFill>
-                        <a:srgbClr val="F4DBCD"/>
+                        <a:srgbClr val="F6E1D5"/>
                       </a:solidFill>
                       <a:prstDash val="solid"/>
                     </a:lnL>
                     <a:lnR w="9525" cap="flat" cmpd="sng" algn="ctr">
                       <a:solidFill>
-                        <a:srgbClr val="F4DBCD"/>
+                        <a:srgbClr val="F6E1D5"/>
                       </a:solidFill>
                       <a:prstDash val="solid"/>
                     </a:lnR>
                     <a:lnT w="9525" cap="flat" cmpd="sng" algn="ctr">
                       <a:solidFill>
-                        <a:srgbClr val="F4DBCD"/>
+                        <a:srgbClr val="F6E1D5"/>
                       </a:solidFill>
                       <a:prstDash val="solid"/>
                     </a:lnT>
                     <a:lnB w="9525" cap="flat" cmpd="sng" algn="ctr">
                       <a:solidFill>
-                        <a:srgbClr val="F4DBCD"/>
+                        <a:srgbClr val="F6E1D5"/>
                       </a:solidFill>
                       <a:prstDash val="solid"/>
                     </a:lnB>
@@ -6553,7 +6915,7 @@
                       <a:r>
                         <a:rPr sz="1500" b="0">
                           <a:solidFill>
-                            <a:srgbClr val="2B2B2B"/>
+                            <a:srgbClr val="26231F"/>
                           </a:solidFill>
                         </a:rPr>
                         <a:t/>
@@ -6563,25 +6925,25 @@
                   <a:tcPr anchor="ctr" marL="73152" marR="73152">
                     <a:lnL w="9525" cap="flat" cmpd="sng" algn="ctr">
                       <a:solidFill>
-                        <a:srgbClr val="F4DBCD"/>
+                        <a:srgbClr val="F6E1D5"/>
                       </a:solidFill>
                       <a:prstDash val="solid"/>
                     </a:lnL>
                     <a:lnR w="9525" cap="flat" cmpd="sng" algn="ctr">
                       <a:solidFill>
-                        <a:srgbClr val="F4DBCD"/>
+                        <a:srgbClr val="F6E1D5"/>
                       </a:solidFill>
                       <a:prstDash val="solid"/>
                     </a:lnR>
                     <a:lnT w="9525" cap="flat" cmpd="sng" algn="ctr">
                       <a:solidFill>
-                        <a:srgbClr val="F4DBCD"/>
+                        <a:srgbClr val="F6E1D5"/>
                       </a:solidFill>
                       <a:prstDash val="solid"/>
                     </a:lnT>
                     <a:lnB w="9525" cap="flat" cmpd="sng" algn="ctr">
                       <a:solidFill>
-                        <a:srgbClr val="F4DBCD"/>
+                        <a:srgbClr val="F6E1D5"/>
                       </a:solidFill>
                       <a:prstDash val="solid"/>
                     </a:lnB>
@@ -6606,6 +6968,14 @@
 <file path=ppt/slides/slide6.xml><?xml version="1.0" encoding="utf-8"?>
 <p:sld xmlns:a="http://schemas.openxmlformats.org/drawingml/2006/main" xmlns:p="http://schemas.openxmlformats.org/presentationml/2006/main" xmlns:r="http://schemas.openxmlformats.org/officeDocument/2006/relationships">
   <p:cSld>
+    <p:bg>
+      <p:bgPr>
+        <a:solidFill>
+          <a:srgbClr val="F6E1D5"/>
+        </a:solidFill>
+        <a:effectLst/>
+      </p:bgPr>
+    </p:bg>
     <p:spTree>
       <p:nvGrpSpPr>
         <p:cNvPr id="1" name=""/>
@@ -6613,30 +6983,102 @@
         <p:nvPr/>
       </p:nvGrpSpPr>
       <p:grpSpPr/>
-      <p:pic>
-        <p:nvPicPr>
-          <p:cNvPr id="3" name="표지 그림" descr="talk-38.jpg"/>
-          <p:cNvPicPr>
-            <a:picLocks noChangeAspect="1"/>
-          </p:cNvPicPr>
+      <p:sp>
+        <p:nvSpPr>
+          <p:cNvPr id="3" name="장식"/>
+          <p:cNvSpPr/>
           <p:nvPr/>
-        </p:nvPicPr>
-        <p:blipFill>
-          <a:blip r:embed="rId2"/>
-          <a:stretch>
-            <a:fillRect/>
-          </a:stretch>
-        </p:blipFill>
+        </p:nvSpPr>
         <p:spPr>
           <a:xfrm>
             <a:off x="0" y="0"/>
-            <a:ext cx="12191695" cy="6858000"/>
+            <a:ext cx="12191695" cy="3154680"/>
           </a:xfrm>
           <a:prstGeom prst="rect">
             <a:avLst/>
           </a:prstGeom>
-        </p:spPr>
-      </p:pic>
+          <a:solidFill>
+            <a:srgbClr val="FFFFFF"/>
+          </a:solidFill>
+          <a:ln>
+            <a:noFill/>
+          </a:ln>
+        </p:spPr>
+        <p:txBody>
+          <a:bodyPr rtlCol="0" anchor="ctr"/>
+          <a:lstStyle/>
+          <a:p>
+            <a:pPr algn="ctr"/>
+          </a:p>
+        </p:txBody>
+      </p:sp>
+      <p:sp>
+        <p:nvSpPr>
+          <p:cNvPr id="4" name="장식"/>
+          <p:cNvSpPr/>
+          <p:nvPr/>
+        </p:nvSpPr>
+        <p:spPr>
+          <a:xfrm>
+            <a:off x="8778020" y="1965960"/>
+            <a:ext cx="2377440" cy="2377440"/>
+          </a:xfrm>
+          <a:prstGeom prst="ellipse">
+            <a:avLst/>
+          </a:prstGeom>
+          <a:solidFill>
+            <a:srgbClr val="EBC4AD"/>
+          </a:solidFill>
+          <a:ln>
+            <a:noFill/>
+          </a:ln>
+        </p:spPr>
+        <p:txBody>
+          <a:bodyPr rtlCol="0" anchor="ctr"/>
+          <a:lstStyle/>
+          <a:p>
+            <a:pPr algn="ctr"/>
+          </a:p>
+        </p:txBody>
+      </p:sp>
+      <p:sp>
+        <p:nvSpPr>
+          <p:cNvPr id="5" name="라벨"/>
+          <p:cNvSpPr txBox="1"/>
+          <p:nvPr/>
+        </p:nvSpPr>
+        <p:spPr>
+          <a:xfrm>
+            <a:off x="822960" y="3657600"/>
+            <a:ext cx="7315017" cy="274320"/>
+          </a:xfrm>
+          <a:prstGeom prst="rect">
+            <a:avLst/>
+          </a:prstGeom>
+          <a:noFill/>
+        </p:spPr>
+        <p:txBody>
+          <a:bodyPr wrap="square" lIns="54864" rIns="54864" tIns="27432" bIns="27432" anchor="t">
+            <a:noAutofit/>
+          </a:bodyPr>
+          <a:lstStyle/>
+          <a:p>
+            <a:pPr algn="l">
+              <a:lnSpc>
+                <a:spcPct val="115000"/>
+              </a:lnSpc>
+            </a:pPr>
+            <a:r>
+              <a:rPr sz="1000" b="1" i="0" spc="250">
+                <a:solidFill>
+                  <a:srgbClr val="26231F"/>
+                </a:solidFill>
+              </a:rPr>
+              <a:t>PRESENTATION</a:t>
+            </a:r>
+          </a:p>
+        </p:txBody>
+      </p:sp>
       <p:sp>
         <p:nvSpPr>
           <p:cNvPr id="2" name="Title 1"/>
@@ -6649,8 +7091,8 @@
         </p:nvSpPr>
         <p:spPr>
           <a:xfrm>
-            <a:off x="853418" y="2057400"/>
-            <a:ext cx="6095847" cy="1554480"/>
+            <a:off x="822960" y="4114800"/>
+            <a:ext cx="7315017" cy="1188720"/>
           </a:xfrm>
         </p:spPr>
         <p:txBody>
@@ -6665,9 +7107,9 @@
               </a:lnSpc>
             </a:pPr>
             <a:r>
-              <a:rPr sz="3600" b="1" i="0">
+              <a:rPr sz="4000" b="1" i="0">
                 <a:solidFill>
-                  <a:srgbClr val="492713"/>
+                  <a:srgbClr val="26231F"/>
                 </a:solidFill>
               </a:rPr>
               <a:t>감사합니다</a:t>
@@ -6677,14 +7119,14 @@
       </p:sp>
       <p:sp>
         <p:nvSpPr>
-          <p:cNvPr id="4" name="한 줄 문구"/>
+          <p:cNvPr id="6" name="한 줄 문구"/>
           <p:cNvSpPr txBox="1"/>
           <p:nvPr/>
         </p:nvSpPr>
         <p:spPr>
           <a:xfrm>
-            <a:off x="853418" y="3749039"/>
-            <a:ext cx="6095847" cy="822960"/>
+            <a:off x="822960" y="5394960"/>
+            <a:ext cx="7315017" cy="822960"/>
           </a:xfrm>
           <a:prstGeom prst="rect">
             <a:avLst/>
@@ -6703,9 +7145,9 @@
               </a:lnSpc>
             </a:pPr>
             <a:r>
-              <a:rPr sz="1700" b="0" i="1">
+              <a:rPr sz="1700" b="0" i="0">
                 <a:solidFill>
-                  <a:srgbClr val="492713"/>
+                  <a:srgbClr val="26231F"/>
                 </a:solidFill>
               </a:rPr>
               <a:t>끝까지 들어 주셔서 고맙습니다</a:t>
@@ -6715,14 +7157,14 @@
       </p:sp>
       <p:sp>
         <p:nvSpPr>
-          <p:cNvPr id="5" name="안내 문구"/>
+          <p:cNvPr id="7" name="안내 문구"/>
           <p:cNvSpPr txBox="1"/>
           <p:nvPr/>
         </p:nvSpPr>
         <p:spPr>
           <a:xfrm>
-            <a:off x="853418" y="4617720"/>
-            <a:ext cx="6095847" cy="914400"/>
+            <a:off x="822960" y="6263640"/>
+            <a:ext cx="7315017" cy="914400"/>
           </a:xfrm>
           <a:prstGeom prst="rect">
             <a:avLst/>
@@ -6743,7 +7185,7 @@
             <a:r>
               <a:rPr sz="1400" b="0" i="0">
                 <a:solidFill>
-                  <a:srgbClr val="666666"/>
+                  <a:srgbClr val="26231F"/>
                 </a:solidFill>
               </a:rPr>
               <a:t>문의 · 연락처를 입력하세요</a:t>
@@ -6770,34 +7212,34 @@
         <a:sysClr val="window" lastClr="FFFFFF"/>
       </a:lt1>
       <a:dk2>
-        <a:srgbClr val="492713"/>
+        <a:srgbClr val="493427"/>
       </a:dk2>
       <a:lt2>
-        <a:srgbClr val="FBF3EF"/>
+        <a:srgbClr val="FBF2EC"/>
       </a:lt2>
       <a:accent1>
-        <a:srgbClr val="995229"/>
+        <a:srgbClr val="D89C79"/>
       </a:accent1>
       <a:accent2>
-        <a:srgbClr val="3B9185"/>
+        <a:srgbClr val="E1D598"/>
       </a:accent2>
       <a:accent3>
-        <a:srgbClr val="492713"/>
+        <a:srgbClr val="493427"/>
       </a:accent3>
       <a:accent4>
-        <a:srgbClr val="F4DBCD"/>
+        <a:srgbClr val="F6E1D5"/>
       </a:accent4>
       <a:accent5>
-        <a:srgbClr val="6A7257"/>
+        <a:srgbClr val="DCB888"/>
       </a:accent5>
       <a:accent6>
-        <a:srgbClr val="927D71"/>
+        <a:srgbClr val="92857D"/>
       </a:accent6>
       <a:hlink>
-        <a:srgbClr val="995229"/>
+        <a:srgbClr val="D89C79"/>
       </a:hlink>
       <a:folHlink>
-        <a:srgbClr val="492713"/>
+        <a:srgbClr val="493427"/>
       </a:folHlink>
     </a:clrScheme>
     <a:fontScheme name="Office">
